--- a/en/slides/19-Computer_Architecture-Instructions_and_Interrupts-Code.pptx
+++ b/en/slides/19-Computer_Architecture-Instructions_and_Interrupts-Code.pptx
@@ -125,22 +125,34 @@
   <p:extLst>
     <p:ext uri="{521415D9-36F7-43E2-AB2F-B90AF26B5E84}">
       <p14:sectionLst xmlns:p14="http://schemas.microsoft.com/office/powerpoint/2010/main">
-        <p14:section name="Opening" id="{a3cf1007-81ee-4ea6-3a1d-4d0c359ea572}">
+        <p14:section name="Opening" id="{67b5581e-8afd-daf5-72a7-b3a22f6f2a9b}">
           <p14:sldIdLst>
             <p14:sldId id="256"/>
             <p14:sldId id="257"/>
           </p14:sldIdLst>
         </p14:section>
-        <p14:section name="The listings" id="{43dc47a5-a699-fd80-f0f6-1f92a9efe684}">
+        <p14:section name="Warm-up on the machine" id="{3c4eec97-e577-a3de-5577-6487b9395356}">
           <p14:sldIdLst>
             <p14:sldId id="258"/>
+          </p14:sldIdLst>
+        </p14:section>
+        <p14:section name="Instructions" id="{736b0eb9-23a2-3780-9de4-47c1fe6c4628}">
+          <p14:sldIdLst>
             <p14:sldId id="259"/>
+          </p14:sldIdLst>
+        </p14:section>
+        <p14:section name="The processor cycle" id="{a2029e1a-7659-8011-653f-6d4204a86f92}">
+          <p14:sldIdLst>
             <p14:sldId id="260"/>
             <p14:sldId id="261"/>
+          </p14:sldIdLst>
+        </p14:section>
+        <p14:section name="The RISC-V solution" id="{2b480761-359e-c55f-3bc6-ddafe504c24c}">
+          <p14:sldIdLst>
             <p14:sldId id="262"/>
           </p14:sldIdLst>
         </p14:section>
-        <p14:section name="The complete program" id="{db5b08d0-b0c9-efda-12c6-253727c4d4c1}">
+        <p14:section name="The complete program" id="{d53a4348-ee34-38e4-e842-98a0258a4852}">
           <p14:sldIdLst>
             <p14:sldId id="263"/>
             <p14:sldId id="264"/>
@@ -150,7 +162,7 @@
             <p14:sldId id="268"/>
           </p14:sldIdLst>
         </p14:section>
-        <p14:section name="Run it and test it" id="{57a44520-b5b6-9ce0-bcc8-01d549bac75b}">
+        <p14:section name="Run it and test it" id="{cfdcaf7f-d577-13ce-f619-546b061fe1af}">
           <p14:sldIdLst>
             <p14:sldId id="269"/>
             <p14:sldId id="270"/>
@@ -159,7 +171,7 @@
             <p14:sldId id="273"/>
           </p14:sldIdLst>
         </p14:section>
-        <p14:section name="Exercises" id="{17dca10f-3fdd-f67e-3a74-ac1f910a9939}">
+        <p14:section name="Exercises" id="{74c0d05b-6c8c-5642-6c96-aca5cfe3aeb3}">
           <p14:sldIdLst>
             <p14:sldId id="274"/>
           </p14:sldIdLst>
@@ -3144,7 +3156,63 @@
       </p:sp>
       <p:sp>
         <p:nvSpPr>
-          <p:cNvPr id="11" name="Shape 9"/>
+          <p:cNvPr id="11" name="Text 9"/>
+          <p:cNvSpPr txBox="1"/>
+          <p:nvPr/>
+        </p:nvSpPr>
+        <p:spPr>
+          <a:xfrm>
+            <a:off x="4693615" y="566928"/>
+            <a:ext cx="6949440" cy="640080"/>
+          </a:xfrm>
+          <a:prstGeom prst="rect">
+            <a:avLst/>
+          </a:prstGeom>
+          <a:noFill/>
+          <a:ln/>
+        </p:spPr>
+        <p:txBody>
+          <a:bodyPr wrap="square" lIns="0" tIns="0" rIns="0" bIns="0" rtlCol="0" anchor="t"/>
+          <a:lstStyle/>
+          <a:p>
+            <a:pPr algn="r" indent="0" marL="0">
+              <a:buNone/>
+            </a:pPr>
+            <a:r>
+              <a:rPr lang="en-US" sz="1300" dirty="0">
+                <a:solidFill>
+                  <a:srgbClr val="CFE3EA"/>
+                </a:solidFill>
+                <a:latin typeface="Calibri" pitchFamily="34" charset="0"/>
+                <a:ea typeface="Calibri" pitchFamily="34" charset="-122"/>
+                <a:cs typeface="Calibri" pitchFamily="34" charset="-120"/>
+              </a:rPr>
+              <a:t>Code deck. The concepts, the figures and the questions are in the lecture deck:</a:t>
+            </a:r>
+            <a:endParaRPr lang="en-US" sz="1300" dirty="0"/>
+          </a:p>
+          <a:p>
+            <a:pPr algn="r" indent="0" marL="0">
+              <a:buNone/>
+            </a:pPr>
+            <a:r>
+              <a:rPr lang="en-US" sz="1300" dirty="0">
+                <a:solidFill>
+                  <a:srgbClr val="CFE3EA"/>
+                </a:solidFill>
+                <a:latin typeface="Calibri" pitchFamily="34" charset="0"/>
+                <a:ea typeface="Calibri" pitchFamily="34" charset="-122"/>
+                <a:cs typeface="Calibri" pitchFamily="34" charset="-120"/>
+              </a:rPr>
+              <a:t>19-Computer_Architecture-Instructions_and_Interrupts.pptx</a:t>
+            </a:r>
+            <a:endParaRPr lang="en-US" sz="1300" dirty="0"/>
+          </a:p>
+        </p:txBody>
+      </p:sp>
+      <p:sp>
+        <p:nvSpPr>
+          <p:cNvPr id="12" name="Shape 10"/>
           <p:cNvSpPr/>
           <p:nvPr/>
         </p:nvSpPr>
@@ -3171,7 +3239,7 @@
       </p:sp>
       <p:pic>
         <p:nvPicPr>
-          <p:cNvPr id="12" name="Image 0" descr="/Users/raffaelemontella/devel/riscv-prg32/computer-architecture-with-prg32/tools/assets/game_asteroids.png">    </p:cNvPr>
+          <p:cNvPr id="13" name="Image 0" descr="/Users/raffaelemontella/devel/riscv-prg32/computer-architecture-with-prg32/tools/assets/game_asteroids.png">    </p:cNvPr>
           <p:cNvPicPr>
             <a:picLocks noChangeAspect="1"/>
           </p:cNvPicPr>

--- a/en/slides/19-Computer_Architecture-Instructions_and_Interrupts-Code.pptx
+++ b/en/slides/19-Computer_Architecture-Instructions_and_Interrupts-Code.pptx
@@ -125,34 +125,34 @@
   <p:extLst>
     <p:ext uri="{521415D9-36F7-43E2-AB2F-B90AF26B5E84}">
       <p14:sectionLst xmlns:p14="http://schemas.microsoft.com/office/powerpoint/2010/main">
-        <p14:section name="Opening" id="{67b5581e-8afd-daf5-72a7-b3a22f6f2a9b}">
+        <p14:section name="Opening" id="{38aeaa01-4fa7-7fde-d705-dbf7574cdaf6}">
           <p14:sldIdLst>
             <p14:sldId id="256"/>
             <p14:sldId id="257"/>
           </p14:sldIdLst>
         </p14:section>
-        <p14:section name="Warm-up on the machine" id="{3c4eec97-e577-a3de-5577-6487b9395356}">
+        <p14:section name="Warm-up on the machine" id="{56046d7c-266b-55db-a2ce-09b64aefe88a}">
           <p14:sldIdLst>
             <p14:sldId id="258"/>
           </p14:sldIdLst>
         </p14:section>
-        <p14:section name="Instructions" id="{736b0eb9-23a2-3780-9de4-47c1fe6c4628}">
+        <p14:section name="Instructions" id="{671a7fe1-682c-9ccd-8b98-e28eac0cea48}">
           <p14:sldIdLst>
             <p14:sldId id="259"/>
           </p14:sldIdLst>
         </p14:section>
-        <p14:section name="The processor cycle" id="{a2029e1a-7659-8011-653f-6d4204a86f92}">
+        <p14:section name="The processor cycle" id="{4ba86d70-4543-0635-d069-c66f55eea8c8}">
           <p14:sldIdLst>
             <p14:sldId id="260"/>
             <p14:sldId id="261"/>
           </p14:sldIdLst>
         </p14:section>
-        <p14:section name="The RISC-V solution" id="{2b480761-359e-c55f-3bc6-ddafe504c24c}">
+        <p14:section name="The RISC-V solution" id="{1de2bd49-81e8-7e90-871b-20f256355ef3}">
           <p14:sldIdLst>
             <p14:sldId id="262"/>
           </p14:sldIdLst>
         </p14:section>
-        <p14:section name="The complete program" id="{d53a4348-ee34-38e4-e842-98a0258a4852}">
+        <p14:section name="The complete program" id="{6fdb9182-b1c8-6a49-878b-c0a4cfb8de86}">
           <p14:sldIdLst>
             <p14:sldId id="263"/>
             <p14:sldId id="264"/>
@@ -162,7 +162,7 @@
             <p14:sldId id="268"/>
           </p14:sldIdLst>
         </p14:section>
-        <p14:section name="Run it and test it" id="{cfdcaf7f-d577-13ce-f619-546b061fe1af}">
+        <p14:section name="Run it and test it" id="{3c33b9a0-0a18-26fb-39ef-c8c967a14813}">
           <p14:sldIdLst>
             <p14:sldId id="269"/>
             <p14:sldId id="270"/>
@@ -171,7 +171,7 @@
             <p14:sldId id="273"/>
           </p14:sldIdLst>
         </p14:section>
-        <p14:section name="Exercises" id="{74c0d05b-6c8c-5642-6c96-aca5cfe3aeb3}">
+        <p14:section name="Exercises" id="{67492b5c-9230-b1db-c9c3-92df2872a6e7}">
           <p14:sldIdLst>
             <p14:sldId id="274"/>
           </p14:sldIdLst>
@@ -580,7 +580,9 @@
           <a:p>
             <a:r>
               <a:rPr lang="en-US" dirty="0"/>
-              <a:t>This is the code deck of Lecture 19. The lecture deck holds the concepts; this one holds everything you type and run: the listings with their explanation, the complete program, what it shows, and the way to test it on each of the three hosts.</a:t>
+              <a:t>This is the code deck of Lecture 19. The lecture deck holds the concepts; this one holds everything you type and run: the listings with their explanation, the complete program, what it shows, and the way to test it on each of the three hosts.
+Learning status: UNDERSTAND NOW, by the end of this lecture you explain it, trace it and apply it on your own; USE NOW, you follow and use the recipe today; how it works inside is explained later, or is not part of the course; UNDERSTAND LATER, recognise the name and what it is for; a later lecture explains it. A slide without a badge is context: a story, an example, a question, an exercise.
+Learning status of this lecture. UNDERSTAND NOW: instruction formats; addressing modes; the processor cycle; interrupts and traps. USE NOW: the complete program, the PRG32 tools (used, not studied, in this course). UNDERSTAND LATER: nothing. A slide without a badge is context: a story, an example, a question, an exercise.</a:t>
             </a:r>
             <a:endParaRPr lang="en-US" dirty="0"/>
           </a:p>
@@ -669,6 +671,7 @@
             <a:r>
               <a:rPr lang="en-US" dirty="0"/>
               <a:t>One page of the complete program, exactly as it is in the repository. Read it from the top: the header says what the program shows and how to build it; the three functions init, update and draw follow, then the data. Lines that you met in the listings of the lecture have the same comments here.
+USE NOW: the complete program (used, not studied, in this course).
 For the lecturer: code/l19.S, as built and run by the tests. The comments are part of the program: read them with the code.</a:t>
             </a:r>
             <a:endParaRPr lang="en-US" dirty="0"/>
@@ -758,6 +761,7 @@
             <a:r>
               <a:rPr lang="en-US" dirty="0"/>
               <a:t>One page of the complete program, exactly as it is in the repository. Read it from the top: the header says what the program shows and how to build it; the three functions init, update and draw follow, then the data. Lines that you met in the listings of the lecture have the same comments here.
+USE NOW: the complete program (used, not studied, in this course).
 For the lecturer: code/l19.S, as built and run by the tests. The comments are part of the program: read them with the code.</a:t>
             </a:r>
             <a:endParaRPr lang="en-US" dirty="0"/>
@@ -847,6 +851,7 @@
             <a:r>
               <a:rPr lang="en-US" dirty="0"/>
               <a:t>One page of the complete program, exactly as it is in the repository. Read it from the top: the header says what the program shows and how to build it; the three functions init, update and draw follow, then the data. Lines that you met in the listings of the lecture have the same comments here.
+USE NOW: the complete program (used, not studied, in this course).
 For the lecturer: code/l19.S, as built and run by the tests. The comments are part of the program: read them with the code.</a:t>
             </a:r>
             <a:endParaRPr lang="en-US" dirty="0"/>
@@ -936,6 +941,7 @@
             <a:r>
               <a:rPr lang="en-US" dirty="0"/>
               <a:t>One page of the complete program, exactly as it is in the repository. Read it from the top: the header says what the program shows and how to build it; the three functions init, update and draw follow, then the data. Lines that you met in the listings of the lecture have the same comments here.
+USE NOW: the complete program (used, not studied, in this course).
 For the lecturer: code/l19.S, as built and run by the tests. The comments are part of the program: read them with the code.</a:t>
             </a:r>
             <a:endParaRPr lang="en-US" dirty="0"/>
@@ -1114,6 +1120,7 @@
             <a:r>
               <a:rPr lang="en-US" dirty="0"/>
               <a:t>The quickest way: PRG32-QT on your own computer. Four steps, each with its command. PRG32-QT behaves like a board on port 8080, which is why the upload command says esp32c6. With debug mode enabled you can stop at any instruction and read registers and memory.
+USE NOW: the PRG32 tools (used, not studied, in this course).
 For the lecturer: Run by the tests: the cartridge of this slide is built with this command and executed on the headless runner of PRG32-QT. Without the toolchain: import the .prg32 file in PRG32-QT and choose Run Cartridge. Keys: arrows or WASD for the joystick, Z or J for A, X or K for B, Enter for Start, Escape to go back to Setup.</a:t>
             </a:r>
             <a:endParaRPr lang="en-US" dirty="0"/>
@@ -1203,6 +1210,7 @@
             <a:r>
               <a:rPr lang="en-US" dirty="0"/>
               <a:t>The same program on the emulator. QEMU runs the real firmware on an emulated chip, so the cartridge must be built for the architecture qemu. Stage the cartridge while QEMU is closed. The firmware opens on the Setup menu: choose Run Cartridge and the slot. Remember that the keyboard is read by the terminal, not by the window with the picture.
+USE NOW: the PRG32 tools (used, not studied, in this course).
 For the lecturer: Checked by the tests up to the staging: the cartridge is built for the architecture qemu and accepted into the flash image of the emulator. What the emulator then shows is not checked automatically: Espressif QEMU needs its window. Since October 2026 the firmware starts on Setup: choose Run Cartridge, then cart0.</a:t>
             </a:r>
             <a:endParaRPr lang="en-US" dirty="0"/>
@@ -1292,6 +1300,7 @@
             <a:r>
               <a:rPr lang="en-US" dirty="0"/>
               <a:t>The same program on the kit. The firmware is written once, through USB; after that cartridges travel over Wi-Fi. The upload command is the one used for PRG32-QT with the address of the board. This is the only host that the automatic tests do not run: try it, and report what you see.
+USE NOW: the PRG32 tools (used, not studied, in this course).
 For the lecturer: Not run by the tests: there is no board on the test machine. The cartridge for the architecture esp32c6 is built by the tests; the steps are those of the PRG32 documentation. If the serial port is not found pass it explicitly. To use the Wi-Fi of the classroom: python3 -m prg32 wifi set --ssid NAME --password PASSWORD --mode sta.</a:t>
             </a:r>
             <a:endParaRPr lang="en-US" dirty="0"/>
@@ -1381,6 +1390,7 @@
             <a:r>
               <a:rPr lang="en-US" dirty="0"/>
               <a:t>The five most common symptoms, what each means, and what to do. Read the message before changing anything: it nearly always names the cause.
+USE NOW: the PRG32 tools (used, not studied, in this course).
 For the lecturer: The first three rows cover most cases. When asking for help, paste the command and the whole message as text. docs/usage/troubleshooting.md of the PRG32 repository has the complete list.</a:t>
             </a:r>
             <a:endParaRPr lang="en-US" dirty="0"/>
@@ -1648,6 +1658,7 @@
             <a:r>
               <a:rPr lang="en-US" dirty="0"/>
               <a:t>Four words of memory, four addresses apart: this is first_update, the function that increments a counter. On the left the addresses, in the middle the machine code, on the right what you wrote. The processor has only the middle column. Three questions organise the lecture. How does it know that the first word is a load and the second an addition? Which steps does it take for each? And while it executes them, how does it notice that a button was pressed or a timer expired?
+UNDERSTAND NOW: instruction formats.
 For the lecturer: The la that precedes these instructions is omitted, and the encodings are the uncompressed 32-bit ones: with the C extension the assembler may choose 16-bit forms for some of them. Addresses are relative to the start of the function.</a:t>
             </a:r>
             <a:endParaRPr lang="en-US" dirty="0"/>
@@ -1737,6 +1748,7 @@
             <a:r>
               <a:rPr lang="en-US" dirty="0"/>
               <a:t>Two instructions decoded by hand. Write the eight hexadecimal digits in binary; cut off the last seven bits, the opcode, which tells you the format; then cut the remaining fields. For 0x006283B3 the opcode says register to register, the fields give x7, x5 and x6, and funct3 with funct7 say addition: add t2, t0, t1. For 0x0002A303 the opcode says load, the immediate is 0, the base is x5, the destination x6: lw t1, 0(t0). Do it once with pencil and paper.
+UNDERSTAND NOW: instruction formats.
 For the lecturer: Method: write the eight hexadecimal digits in binary, cut off the last seven bits (the opcode), look up the format, then cut the fields. The decoders of Lecture 11 do the same thing in a fraction of a nanosecond.</a:t>
             </a:r>
             <a:endParaRPr lang="en-US" dirty="0"/>
@@ -1826,6 +1838,7 @@
             <a:r>
               <a:rPr lang="en-US" dirty="0"/>
               <a:t>The fetch phase in four register transfers, using the registers of the model of Lecture 18. The content of the PC goes to MA, the memory address register. The memory is read and the word arrives in MB, the buffer. The word is copied into D, the decoding register. The PC is increased by 4, because an instruction occupies four bytes, so that it points to the next one. Each row is a transfer on the internal bus, commanded by the control unit.
+UNDERSTAND NOW: the processor cycle.
 For the lecturer: Fase fetch. PC, D, MA and MB are the registers of the reference model of Lecture 18; the transfers travel on the internal bus. In the original deck the machine had 16-bit words and the PC advanced by 2; in RV32 a word is four bytes, so the PC advances by 4 (by 2 after a compressed instruction).</a:t>
             </a:r>
             <a:endParaRPr lang="en-US" dirty="0"/>
@@ -1915,6 +1928,7 @@
             <a:r>
               <a:rPr lang="en-US" dirty="0"/>
               <a:t>The other four phases, side by side for two instructions. For add, decoding reads the two registers into the operand registers of the ALU, execution adds them, the memory phase is skipped, and the sum is written in t2. For lw, the second operand is the immediate, the sum is an address, the memory phase reads the word at that address, and the word read is written in t1. The same adder serves both: only the commands of the control unit differ.
+UNDERSTAND NOW: the processor cycle.
 For the lecturer: O1, O2 and U are the registers of the ALU. The same adder computes a sum for add and an address for lw: only the control signals differ. A store ends at the memory phase; a branch ends at execute, by choosing the next PC.</a:t>
             </a:r>
             <a:endParaRPr lang="en-US" dirty="0"/>
@@ -2004,6 +2018,7 @@
             <a:r>
               <a:rPr lang="en-US" dirty="0"/>
               <a:t>A handler in outline. It makes room on the stack and saves the registers it is going to use: the software part of the context. It reads mcause with csrr and tests its sign: the top bit is the sign bit, so bgez separates exceptions from interrupts with one instruction. After serving the event it restores the registers, releases the stack and executes mret. The interrupted program must not notice anything: one register left dirty here is a bug that appears at random, anywhere.
+UNDERSTAND NOW: interrupts and traps.
 For the lecturer: An outline, not the PRG32 source: a real handler saves all the caller-saved registers, usually on a separate stack reached through mscratch. csrr t0, mcause is the pseudo-instruction for csrrs t0, mcause, zero.</a:t>
             </a:r>
             <a:endParaRPr lang="en-US" dirty="0"/>
@@ -2093,6 +2108,7 @@
             <a:r>
               <a:rPr lang="en-US" dirty="0"/>
               <a:t>One page of the complete program, exactly as it is in the repository. Read it from the top: the header says what the program shows and how to build it; the three functions init, update and draw follow, then the data. Lines that you met in the listings of the lecture have the same comments here.
+USE NOW: the complete program (used, not studied, in this course).
 For the lecturer: code/l19.S, as built and run by the tests. The comments are part of the program: read them with the code.</a:t>
             </a:r>
             <a:endParaRPr lang="en-US" dirty="0"/>
@@ -2182,6 +2198,7 @@
             <a:r>
               <a:rPr lang="en-US" dirty="0"/>
               <a:t>One page of the complete program, exactly as it is in the repository. Read it from the top: the header says what the program shows and how to build it; the three functions init, update and draw follow, then the data. Lines that you met in the listings of the lecture have the same comments here.
+USE NOW: the complete program (used, not studied, in this course).
 For the lecturer: code/l19.S, as built and run by the tests. The comments are part of the program: read them with the code.</a:t>
             </a:r>
             <a:endParaRPr lang="en-US" dirty="0"/>
@@ -3263,6 +3280,420 @@
       </p:pic>
       <p:sp>
         <p:nvSpPr>
+          <p:cNvPr id="14" name="Shape 11"/>
+          <p:cNvSpPr/>
+          <p:nvPr/>
+        </p:nvSpPr>
+        <p:spPr>
+          <a:xfrm>
+            <a:off x="9690303" y="91440"/>
+            <a:ext cx="1952752" cy="274320"/>
+          </a:xfrm>
+          <a:prstGeom prst="rect">
+            <a:avLst/>
+          </a:prstGeom>
+          <a:solidFill>
+            <a:srgbClr val="F3E8FF"/>
+          </a:solidFill>
+          <a:ln w="12700">
+            <a:solidFill>
+              <a:srgbClr val="7E22CE"/>
+            </a:solidFill>
+            <a:prstDash val="dash"/>
+          </a:ln>
+        </p:spPr>
+      </p:sp>
+      <p:sp>
+        <p:nvSpPr>
+          <p:cNvPr id="15" name="Shape 12"/>
+          <p:cNvSpPr/>
+          <p:nvPr/>
+        </p:nvSpPr>
+        <p:spPr>
+          <a:xfrm>
+            <a:off x="9717735" y="128016"/>
+            <a:ext cx="45720" cy="45720"/>
+          </a:xfrm>
+          <a:prstGeom prst="rect">
+            <a:avLst/>
+          </a:prstGeom>
+          <a:solidFill>
+            <a:srgbClr val="7E22CE"/>
+          </a:solidFill>
+          <a:ln w="12700">
+            <a:solidFill>
+              <a:srgbClr val="7E22CE"/>
+            </a:solidFill>
+            <a:prstDash val="solid"/>
+          </a:ln>
+        </p:spPr>
+      </p:sp>
+      <p:sp>
+        <p:nvSpPr>
+          <p:cNvPr id="16" name="Shape 13"/>
+          <p:cNvSpPr/>
+          <p:nvPr/>
+        </p:nvSpPr>
+        <p:spPr>
+          <a:xfrm>
+            <a:off x="9717735" y="205740"/>
+            <a:ext cx="45720" cy="45720"/>
+          </a:xfrm>
+          <a:prstGeom prst="rect">
+            <a:avLst/>
+          </a:prstGeom>
+          <a:solidFill>
+            <a:srgbClr val="7E22CE"/>
+          </a:solidFill>
+          <a:ln w="12700">
+            <a:solidFill>
+              <a:srgbClr val="7E22CE"/>
+            </a:solidFill>
+            <a:prstDash val="solid"/>
+          </a:ln>
+        </p:spPr>
+      </p:sp>
+      <p:sp>
+        <p:nvSpPr>
+          <p:cNvPr id="17" name="Shape 14"/>
+          <p:cNvSpPr/>
+          <p:nvPr/>
+        </p:nvSpPr>
+        <p:spPr>
+          <a:xfrm>
+            <a:off x="9717735" y="283464"/>
+            <a:ext cx="45720" cy="45720"/>
+          </a:xfrm>
+          <a:prstGeom prst="rect">
+            <a:avLst/>
+          </a:prstGeom>
+          <a:solidFill>
+            <a:srgbClr val="7E22CE"/>
+          </a:solidFill>
+          <a:ln w="12700">
+            <a:solidFill>
+              <a:srgbClr val="7E22CE"/>
+            </a:solidFill>
+            <a:prstDash val="solid"/>
+          </a:ln>
+        </p:spPr>
+      </p:sp>
+      <p:pic>
+        <p:nvPicPr>
+          <p:cNvPr id="18" name="Image 1" descr="preencoded.png">    </p:cNvPr>
+          <p:cNvPicPr>
+            <a:picLocks noChangeAspect="1"/>
+          </p:cNvPicPr>
+          <p:nvPr/>
+        </p:nvPicPr>
+        <p:blipFill>
+          <a:blip r:embed="rId2"/>
+          <a:stretch>
+            <a:fillRect/>
+          </a:stretch>
+        </p:blipFill>
+        <p:spPr>
+          <a:xfrm>
+            <a:off x="9818319" y="128016"/>
+            <a:ext cx="201168" cy="201168"/>
+          </a:xfrm>
+          <a:prstGeom prst="rect">
+            <a:avLst/>
+          </a:prstGeom>
+        </p:spPr>
+      </p:pic>
+      <p:sp>
+        <p:nvSpPr>
+          <p:cNvPr id="19" name="Text 15"/>
+          <p:cNvSpPr txBox="1"/>
+          <p:nvPr/>
+        </p:nvSpPr>
+        <p:spPr>
+          <a:xfrm>
+            <a:off x="10074351" y="91440"/>
+            <a:ext cx="1532128" cy="274320"/>
+          </a:xfrm>
+          <a:prstGeom prst="rect">
+            <a:avLst/>
+          </a:prstGeom>
+          <a:noFill/>
+          <a:ln/>
+        </p:spPr>
+        <p:txBody>
+          <a:bodyPr wrap="square" lIns="0" tIns="0" rIns="0" bIns="0" rtlCol="0" anchor="ctr"/>
+          <a:lstStyle/>
+          <a:p>
+            <a:pPr indent="0" marL="0">
+              <a:buNone/>
+            </a:pPr>
+            <a:r>
+              <a:rPr lang="en-US" sz="1100" b="1" dirty="0">
+                <a:solidFill>
+                  <a:srgbClr val="6B21A8"/>
+                </a:solidFill>
+                <a:latin typeface="Calibri" pitchFamily="34" charset="0"/>
+                <a:ea typeface="Calibri" pitchFamily="34" charset="-122"/>
+                <a:cs typeface="Calibri" pitchFamily="34" charset="-120"/>
+              </a:rPr>
+              <a:t>UNDERSTAND LATER</a:t>
+            </a:r>
+            <a:endParaRPr lang="en-US" sz="1100" dirty="0"/>
+          </a:p>
+        </p:txBody>
+      </p:sp>
+      <p:sp>
+        <p:nvSpPr>
+          <p:cNvPr id="20" name="Shape 16"/>
+          <p:cNvSpPr/>
+          <p:nvPr/>
+        </p:nvSpPr>
+        <p:spPr>
+          <a:xfrm>
+            <a:off x="8407349" y="91440"/>
+            <a:ext cx="1173226" cy="274320"/>
+          </a:xfrm>
+          <a:prstGeom prst="rect">
+            <a:avLst/>
+          </a:prstGeom>
+          <a:solidFill>
+            <a:srgbClr val="FEF3C7"/>
+          </a:solidFill>
+          <a:ln w="12700">
+            <a:solidFill>
+              <a:srgbClr val="B45309"/>
+            </a:solidFill>
+            <a:prstDash val="solid"/>
+          </a:ln>
+        </p:spPr>
+      </p:sp>
+      <p:sp>
+        <p:nvSpPr>
+          <p:cNvPr id="21" name="Shape 17"/>
+          <p:cNvSpPr/>
+          <p:nvPr/>
+        </p:nvSpPr>
+        <p:spPr>
+          <a:xfrm>
+            <a:off x="8407349" y="91440"/>
+            <a:ext cx="27432" cy="274320"/>
+          </a:xfrm>
+          <a:prstGeom prst="rect">
+            <a:avLst/>
+          </a:prstGeom>
+          <a:solidFill>
+            <a:srgbClr val="B45309"/>
+          </a:solidFill>
+          <a:ln w="12700">
+            <a:solidFill>
+              <a:srgbClr val="B45309"/>
+            </a:solidFill>
+            <a:prstDash val="solid"/>
+          </a:ln>
+        </p:spPr>
+      </p:sp>
+      <p:sp>
+        <p:nvSpPr>
+          <p:cNvPr id="22" name="Shape 18"/>
+          <p:cNvSpPr/>
+          <p:nvPr/>
+        </p:nvSpPr>
+        <p:spPr>
+          <a:xfrm>
+            <a:off x="8462213" y="91440"/>
+            <a:ext cx="27432" cy="274320"/>
+          </a:xfrm>
+          <a:prstGeom prst="rect">
+            <a:avLst/>
+          </a:prstGeom>
+          <a:solidFill>
+            <a:srgbClr val="B45309"/>
+          </a:solidFill>
+          <a:ln w="12700">
+            <a:solidFill>
+              <a:srgbClr val="B45309"/>
+            </a:solidFill>
+            <a:prstDash val="solid"/>
+          </a:ln>
+        </p:spPr>
+      </p:sp>
+      <p:pic>
+        <p:nvPicPr>
+          <p:cNvPr id="23" name="Image 2" descr="preencoded.png">    </p:cNvPr>
+          <p:cNvPicPr>
+            <a:picLocks noChangeAspect="1"/>
+          </p:cNvPicPr>
+          <p:nvPr/>
+        </p:nvPicPr>
+        <p:blipFill>
+          <a:blip r:embed="rId3"/>
+          <a:stretch>
+            <a:fillRect/>
+          </a:stretch>
+        </p:blipFill>
+        <p:spPr>
+          <a:xfrm>
+            <a:off x="8535365" y="128016"/>
+            <a:ext cx="201168" cy="201168"/>
+          </a:xfrm>
+          <a:prstGeom prst="rect">
+            <a:avLst/>
+          </a:prstGeom>
+        </p:spPr>
+      </p:pic>
+      <p:sp>
+        <p:nvSpPr>
+          <p:cNvPr id="24" name="Text 19"/>
+          <p:cNvSpPr txBox="1"/>
+          <p:nvPr/>
+        </p:nvSpPr>
+        <p:spPr>
+          <a:xfrm>
+            <a:off x="8791397" y="91440"/>
+            <a:ext cx="752602" cy="274320"/>
+          </a:xfrm>
+          <a:prstGeom prst="rect">
+            <a:avLst/>
+          </a:prstGeom>
+          <a:noFill/>
+          <a:ln/>
+        </p:spPr>
+        <p:txBody>
+          <a:bodyPr wrap="square" lIns="0" tIns="0" rIns="0" bIns="0" rtlCol="0" anchor="ctr"/>
+          <a:lstStyle/>
+          <a:p>
+            <a:pPr indent="0" marL="0">
+              <a:buNone/>
+            </a:pPr>
+            <a:r>
+              <a:rPr lang="en-US" sz="1100" b="1" dirty="0">
+                <a:solidFill>
+                  <a:srgbClr val="92400E"/>
+                </a:solidFill>
+                <a:latin typeface="Calibri" pitchFamily="34" charset="0"/>
+                <a:ea typeface="Calibri" pitchFamily="34" charset="-122"/>
+                <a:cs typeface="Calibri" pitchFamily="34" charset="-120"/>
+              </a:rPr>
+              <a:t>USE NOW</a:t>
+            </a:r>
+            <a:endParaRPr lang="en-US" sz="1100" dirty="0"/>
+          </a:p>
+        </p:txBody>
+      </p:sp>
+      <p:sp>
+        <p:nvSpPr>
+          <p:cNvPr id="25" name="Shape 20"/>
+          <p:cNvSpPr/>
+          <p:nvPr/>
+        </p:nvSpPr>
+        <p:spPr>
+          <a:xfrm>
+            <a:off x="6518097" y="91440"/>
+            <a:ext cx="1779524" cy="274320"/>
+          </a:xfrm>
+          <a:prstGeom prst="rect">
+            <a:avLst/>
+          </a:prstGeom>
+          <a:solidFill>
+            <a:srgbClr val="E0F2FE"/>
+          </a:solidFill>
+          <a:ln w="12700">
+            <a:solidFill>
+              <a:srgbClr val="0369A1"/>
+            </a:solidFill>
+            <a:prstDash val="solid"/>
+          </a:ln>
+        </p:spPr>
+      </p:sp>
+      <p:sp>
+        <p:nvSpPr>
+          <p:cNvPr id="26" name="Shape 21"/>
+          <p:cNvSpPr/>
+          <p:nvPr/>
+        </p:nvSpPr>
+        <p:spPr>
+          <a:xfrm>
+            <a:off x="6518097" y="91440"/>
+            <a:ext cx="73152" cy="274320"/>
+          </a:xfrm>
+          <a:prstGeom prst="rect">
+            <a:avLst/>
+          </a:prstGeom>
+          <a:solidFill>
+            <a:srgbClr val="0369A1"/>
+          </a:solidFill>
+          <a:ln w="12700">
+            <a:solidFill>
+              <a:srgbClr val="0369A1"/>
+            </a:solidFill>
+            <a:prstDash val="solid"/>
+          </a:ln>
+        </p:spPr>
+      </p:sp>
+      <p:pic>
+        <p:nvPicPr>
+          <p:cNvPr id="27" name="Image 3" descr="preencoded.png">    </p:cNvPr>
+          <p:cNvPicPr>
+            <a:picLocks noChangeAspect="1"/>
+          </p:cNvPicPr>
+          <p:nvPr/>
+        </p:nvPicPr>
+        <p:blipFill>
+          <a:blip r:embed="rId4"/>
+          <a:stretch>
+            <a:fillRect/>
+          </a:stretch>
+        </p:blipFill>
+        <p:spPr>
+          <a:xfrm>
+            <a:off x="6646113" y="128016"/>
+            <a:ext cx="201168" cy="201168"/>
+          </a:xfrm>
+          <a:prstGeom prst="rect">
+            <a:avLst/>
+          </a:prstGeom>
+        </p:spPr>
+      </p:pic>
+      <p:sp>
+        <p:nvSpPr>
+          <p:cNvPr id="28" name="Text 22"/>
+          <p:cNvSpPr txBox="1"/>
+          <p:nvPr/>
+        </p:nvSpPr>
+        <p:spPr>
+          <a:xfrm>
+            <a:off x="6902145" y="91440"/>
+            <a:ext cx="1358900" cy="274320"/>
+          </a:xfrm>
+          <a:prstGeom prst="rect">
+            <a:avLst/>
+          </a:prstGeom>
+          <a:noFill/>
+          <a:ln/>
+        </p:spPr>
+        <p:txBody>
+          <a:bodyPr wrap="square" lIns="0" tIns="0" rIns="0" bIns="0" rtlCol="0" anchor="ctr"/>
+          <a:lstStyle/>
+          <a:p>
+            <a:pPr indent="0" marL="0">
+              <a:buNone/>
+            </a:pPr>
+            <a:r>
+              <a:rPr lang="en-US" sz="1100" b="1" dirty="0">
+                <a:solidFill>
+                  <a:srgbClr val="075985"/>
+                </a:solidFill>
+                <a:latin typeface="Calibri" pitchFamily="34" charset="0"/>
+                <a:ea typeface="Calibri" pitchFamily="34" charset="-122"/>
+                <a:cs typeface="Calibri" pitchFamily="34" charset="-120"/>
+              </a:rPr>
+              <a:t>UNDERSTAND NOW</a:t>
+            </a:r>
+            <a:endParaRPr lang="en-US" sz="1100" dirty="0"/>
+          </a:p>
+        </p:txBody>
+      </p:sp>
+      <p:sp>
+        <p:nvSpPr>
           <p:cNvPr id="25" name="Slide Number Placeholder 0"/>
           <p:cNvSpPr>
             <a:spLocks noGrp="1"/>
@@ -3904,6 +4335,158 @@
       </p:sp>
       <p:sp>
         <p:nvSpPr>
+          <p:cNvPr id="5" name="Shape 3"/>
+          <p:cNvSpPr/>
+          <p:nvPr/>
+        </p:nvSpPr>
+        <p:spPr>
+          <a:xfrm>
+            <a:off x="8959672" y="91440"/>
+            <a:ext cx="2683383" cy="274320"/>
+          </a:xfrm>
+          <a:prstGeom prst="rect">
+            <a:avLst/>
+          </a:prstGeom>
+          <a:solidFill>
+            <a:srgbClr val="FEF3C7"/>
+          </a:solidFill>
+          <a:ln w="12700">
+            <a:solidFill>
+              <a:srgbClr val="B45309"/>
+            </a:solidFill>
+            <a:prstDash val="solid"/>
+          </a:ln>
+        </p:spPr>
+      </p:sp>
+      <p:sp>
+        <p:nvSpPr>
+          <p:cNvPr id="6" name="Shape 4"/>
+          <p:cNvSpPr/>
+          <p:nvPr/>
+        </p:nvSpPr>
+        <p:spPr>
+          <a:xfrm>
+            <a:off x="8959672" y="91440"/>
+            <a:ext cx="27432" cy="274320"/>
+          </a:xfrm>
+          <a:prstGeom prst="rect">
+            <a:avLst/>
+          </a:prstGeom>
+          <a:solidFill>
+            <a:srgbClr val="B45309"/>
+          </a:solidFill>
+          <a:ln w="12700">
+            <a:solidFill>
+              <a:srgbClr val="B45309"/>
+            </a:solidFill>
+            <a:prstDash val="solid"/>
+          </a:ln>
+        </p:spPr>
+      </p:sp>
+      <p:sp>
+        <p:nvSpPr>
+          <p:cNvPr id="7" name="Shape 5"/>
+          <p:cNvSpPr/>
+          <p:nvPr/>
+        </p:nvSpPr>
+        <p:spPr>
+          <a:xfrm>
+            <a:off x="9014536" y="91440"/>
+            <a:ext cx="27432" cy="274320"/>
+          </a:xfrm>
+          <a:prstGeom prst="rect">
+            <a:avLst/>
+          </a:prstGeom>
+          <a:solidFill>
+            <a:srgbClr val="B45309"/>
+          </a:solidFill>
+          <a:ln w="12700">
+            <a:solidFill>
+              <a:srgbClr val="B45309"/>
+            </a:solidFill>
+            <a:prstDash val="solid"/>
+          </a:ln>
+        </p:spPr>
+      </p:sp>
+      <p:pic>
+        <p:nvPicPr>
+          <p:cNvPr id="8" name="Image 0" descr="preencoded.png">    </p:cNvPr>
+          <p:cNvPicPr>
+            <a:picLocks noChangeAspect="1"/>
+          </p:cNvPicPr>
+          <p:nvPr/>
+        </p:nvPicPr>
+        <p:blipFill>
+          <a:blip r:embed="rId1"/>
+          <a:stretch>
+            <a:fillRect/>
+          </a:stretch>
+        </p:blipFill>
+        <p:spPr>
+          <a:xfrm>
+            <a:off x="9087688" y="128016"/>
+            <a:ext cx="201168" cy="201168"/>
+          </a:xfrm>
+          <a:prstGeom prst="rect">
+            <a:avLst/>
+          </a:prstGeom>
+        </p:spPr>
+      </p:pic>
+      <p:sp>
+        <p:nvSpPr>
+          <p:cNvPr id="9" name="Text 6"/>
+          <p:cNvSpPr txBox="1"/>
+          <p:nvPr/>
+        </p:nvSpPr>
+        <p:spPr>
+          <a:xfrm>
+            <a:off x="9343720" y="91440"/>
+            <a:ext cx="2262759" cy="274320"/>
+          </a:xfrm>
+          <a:prstGeom prst="rect">
+            <a:avLst/>
+          </a:prstGeom>
+          <a:noFill/>
+          <a:ln/>
+        </p:spPr>
+        <p:txBody>
+          <a:bodyPr wrap="square" lIns="0" tIns="0" rIns="0" bIns="0" rtlCol="0" anchor="ctr"/>
+          <a:lstStyle/>
+          <a:p>
+            <a:pPr indent="0" marL="0">
+              <a:buNone/>
+            </a:pPr>
+            <a:r>
+              <a:rPr lang="en-US" sz="1100" b="1" dirty="0">
+                <a:solidFill>
+                  <a:srgbClr val="92400E"/>
+                </a:solidFill>
+                <a:latin typeface="Calibri" pitchFamily="34" charset="0"/>
+                <a:ea typeface="Calibri" pitchFamily="34" charset="-122"/>
+                <a:cs typeface="Calibri" pitchFamily="34" charset="-120"/>
+              </a:rPr>
+              <a:t>USE NOW</a:t>
+            </a:r>
+            <a:pPr indent="0" marL="0">
+              <a:buNone/>
+            </a:pPr>
+            <a:r>
+              <a:rPr lang="en-US" sz="1100" dirty="0">
+                <a:solidFill>
+                  <a:srgbClr val="92400E"/>
+                </a:solidFill>
+                <a:latin typeface="Calibri" pitchFamily="34" charset="0"/>
+                <a:ea typeface="Calibri" pitchFamily="34" charset="-122"/>
+                <a:cs typeface="Calibri" pitchFamily="34" charset="-120"/>
+              </a:rPr>
+              <a:t> · the complete program</a:t>
+            </a:r>
+            <a:endParaRPr lang="en-US" sz="1100" dirty="0"/>
+          </a:p>
+        </p:txBody>
+      </p:sp>
+      <p:sp>
+        <p:nvSpPr>
           <p:cNvPr id="25" name="Slide Number Placeholder 0"/>
           <p:cNvSpPr>
             <a:spLocks noGrp="1"/>
@@ -4288,6 +4871,158 @@
       </p:sp>
       <p:sp>
         <p:nvSpPr>
+          <p:cNvPr id="5" name="Shape 3"/>
+          <p:cNvSpPr/>
+          <p:nvPr/>
+        </p:nvSpPr>
+        <p:spPr>
+          <a:xfrm>
+            <a:off x="8959672" y="91440"/>
+            <a:ext cx="2683383" cy="274320"/>
+          </a:xfrm>
+          <a:prstGeom prst="rect">
+            <a:avLst/>
+          </a:prstGeom>
+          <a:solidFill>
+            <a:srgbClr val="FEF3C7"/>
+          </a:solidFill>
+          <a:ln w="12700">
+            <a:solidFill>
+              <a:srgbClr val="B45309"/>
+            </a:solidFill>
+            <a:prstDash val="solid"/>
+          </a:ln>
+        </p:spPr>
+      </p:sp>
+      <p:sp>
+        <p:nvSpPr>
+          <p:cNvPr id="6" name="Shape 4"/>
+          <p:cNvSpPr/>
+          <p:nvPr/>
+        </p:nvSpPr>
+        <p:spPr>
+          <a:xfrm>
+            <a:off x="8959672" y="91440"/>
+            <a:ext cx="27432" cy="274320"/>
+          </a:xfrm>
+          <a:prstGeom prst="rect">
+            <a:avLst/>
+          </a:prstGeom>
+          <a:solidFill>
+            <a:srgbClr val="B45309"/>
+          </a:solidFill>
+          <a:ln w="12700">
+            <a:solidFill>
+              <a:srgbClr val="B45309"/>
+            </a:solidFill>
+            <a:prstDash val="solid"/>
+          </a:ln>
+        </p:spPr>
+      </p:sp>
+      <p:sp>
+        <p:nvSpPr>
+          <p:cNvPr id="7" name="Shape 5"/>
+          <p:cNvSpPr/>
+          <p:nvPr/>
+        </p:nvSpPr>
+        <p:spPr>
+          <a:xfrm>
+            <a:off x="9014536" y="91440"/>
+            <a:ext cx="27432" cy="274320"/>
+          </a:xfrm>
+          <a:prstGeom prst="rect">
+            <a:avLst/>
+          </a:prstGeom>
+          <a:solidFill>
+            <a:srgbClr val="B45309"/>
+          </a:solidFill>
+          <a:ln w="12700">
+            <a:solidFill>
+              <a:srgbClr val="B45309"/>
+            </a:solidFill>
+            <a:prstDash val="solid"/>
+          </a:ln>
+        </p:spPr>
+      </p:sp>
+      <p:pic>
+        <p:nvPicPr>
+          <p:cNvPr id="8" name="Image 0" descr="preencoded.png">    </p:cNvPr>
+          <p:cNvPicPr>
+            <a:picLocks noChangeAspect="1"/>
+          </p:cNvPicPr>
+          <p:nvPr/>
+        </p:nvPicPr>
+        <p:blipFill>
+          <a:blip r:embed="rId1"/>
+          <a:stretch>
+            <a:fillRect/>
+          </a:stretch>
+        </p:blipFill>
+        <p:spPr>
+          <a:xfrm>
+            <a:off x="9087688" y="128016"/>
+            <a:ext cx="201168" cy="201168"/>
+          </a:xfrm>
+          <a:prstGeom prst="rect">
+            <a:avLst/>
+          </a:prstGeom>
+        </p:spPr>
+      </p:pic>
+      <p:sp>
+        <p:nvSpPr>
+          <p:cNvPr id="9" name="Text 6"/>
+          <p:cNvSpPr txBox="1"/>
+          <p:nvPr/>
+        </p:nvSpPr>
+        <p:spPr>
+          <a:xfrm>
+            <a:off x="9343720" y="91440"/>
+            <a:ext cx="2262759" cy="274320"/>
+          </a:xfrm>
+          <a:prstGeom prst="rect">
+            <a:avLst/>
+          </a:prstGeom>
+          <a:noFill/>
+          <a:ln/>
+        </p:spPr>
+        <p:txBody>
+          <a:bodyPr wrap="square" lIns="0" tIns="0" rIns="0" bIns="0" rtlCol="0" anchor="ctr"/>
+          <a:lstStyle/>
+          <a:p>
+            <a:pPr indent="0" marL="0">
+              <a:buNone/>
+            </a:pPr>
+            <a:r>
+              <a:rPr lang="en-US" sz="1100" b="1" dirty="0">
+                <a:solidFill>
+                  <a:srgbClr val="92400E"/>
+                </a:solidFill>
+                <a:latin typeface="Calibri" pitchFamily="34" charset="0"/>
+                <a:ea typeface="Calibri" pitchFamily="34" charset="-122"/>
+                <a:cs typeface="Calibri" pitchFamily="34" charset="-120"/>
+              </a:rPr>
+              <a:t>USE NOW</a:t>
+            </a:r>
+            <a:pPr indent="0" marL="0">
+              <a:buNone/>
+            </a:pPr>
+            <a:r>
+              <a:rPr lang="en-US" sz="1100" dirty="0">
+                <a:solidFill>
+                  <a:srgbClr val="92400E"/>
+                </a:solidFill>
+                <a:latin typeface="Calibri" pitchFamily="34" charset="0"/>
+                <a:ea typeface="Calibri" pitchFamily="34" charset="-122"/>
+                <a:cs typeface="Calibri" pitchFamily="34" charset="-120"/>
+              </a:rPr>
+              <a:t> · the complete program</a:t>
+            </a:r>
+            <a:endParaRPr lang="en-US" sz="1100" dirty="0"/>
+          </a:p>
+        </p:txBody>
+      </p:sp>
+      <p:sp>
+        <p:nvSpPr>
           <p:cNvPr id="25" name="Slide Number Placeholder 0"/>
           <p:cNvSpPr>
             <a:spLocks noGrp="1"/>
@@ -4999,6 +5734,158 @@
       </p:sp>
       <p:sp>
         <p:nvSpPr>
+          <p:cNvPr id="5" name="Shape 3"/>
+          <p:cNvSpPr/>
+          <p:nvPr/>
+        </p:nvSpPr>
+        <p:spPr>
+          <a:xfrm>
+            <a:off x="8959672" y="91440"/>
+            <a:ext cx="2683383" cy="274320"/>
+          </a:xfrm>
+          <a:prstGeom prst="rect">
+            <a:avLst/>
+          </a:prstGeom>
+          <a:solidFill>
+            <a:srgbClr val="FEF3C7"/>
+          </a:solidFill>
+          <a:ln w="12700">
+            <a:solidFill>
+              <a:srgbClr val="B45309"/>
+            </a:solidFill>
+            <a:prstDash val="solid"/>
+          </a:ln>
+        </p:spPr>
+      </p:sp>
+      <p:sp>
+        <p:nvSpPr>
+          <p:cNvPr id="6" name="Shape 4"/>
+          <p:cNvSpPr/>
+          <p:nvPr/>
+        </p:nvSpPr>
+        <p:spPr>
+          <a:xfrm>
+            <a:off x="8959672" y="91440"/>
+            <a:ext cx="27432" cy="274320"/>
+          </a:xfrm>
+          <a:prstGeom prst="rect">
+            <a:avLst/>
+          </a:prstGeom>
+          <a:solidFill>
+            <a:srgbClr val="B45309"/>
+          </a:solidFill>
+          <a:ln w="12700">
+            <a:solidFill>
+              <a:srgbClr val="B45309"/>
+            </a:solidFill>
+            <a:prstDash val="solid"/>
+          </a:ln>
+        </p:spPr>
+      </p:sp>
+      <p:sp>
+        <p:nvSpPr>
+          <p:cNvPr id="7" name="Shape 5"/>
+          <p:cNvSpPr/>
+          <p:nvPr/>
+        </p:nvSpPr>
+        <p:spPr>
+          <a:xfrm>
+            <a:off x="9014536" y="91440"/>
+            <a:ext cx="27432" cy="274320"/>
+          </a:xfrm>
+          <a:prstGeom prst="rect">
+            <a:avLst/>
+          </a:prstGeom>
+          <a:solidFill>
+            <a:srgbClr val="B45309"/>
+          </a:solidFill>
+          <a:ln w="12700">
+            <a:solidFill>
+              <a:srgbClr val="B45309"/>
+            </a:solidFill>
+            <a:prstDash val="solid"/>
+          </a:ln>
+        </p:spPr>
+      </p:sp>
+      <p:pic>
+        <p:nvPicPr>
+          <p:cNvPr id="8" name="Image 0" descr="preencoded.png">    </p:cNvPr>
+          <p:cNvPicPr>
+            <a:picLocks noChangeAspect="1"/>
+          </p:cNvPicPr>
+          <p:nvPr/>
+        </p:nvPicPr>
+        <p:blipFill>
+          <a:blip r:embed="rId1"/>
+          <a:stretch>
+            <a:fillRect/>
+          </a:stretch>
+        </p:blipFill>
+        <p:spPr>
+          <a:xfrm>
+            <a:off x="9087688" y="128016"/>
+            <a:ext cx="201168" cy="201168"/>
+          </a:xfrm>
+          <a:prstGeom prst="rect">
+            <a:avLst/>
+          </a:prstGeom>
+        </p:spPr>
+      </p:pic>
+      <p:sp>
+        <p:nvSpPr>
+          <p:cNvPr id="9" name="Text 6"/>
+          <p:cNvSpPr txBox="1"/>
+          <p:nvPr/>
+        </p:nvSpPr>
+        <p:spPr>
+          <a:xfrm>
+            <a:off x="9343720" y="91440"/>
+            <a:ext cx="2262759" cy="274320"/>
+          </a:xfrm>
+          <a:prstGeom prst="rect">
+            <a:avLst/>
+          </a:prstGeom>
+          <a:noFill/>
+          <a:ln/>
+        </p:spPr>
+        <p:txBody>
+          <a:bodyPr wrap="square" lIns="0" tIns="0" rIns="0" bIns="0" rtlCol="0" anchor="ctr"/>
+          <a:lstStyle/>
+          <a:p>
+            <a:pPr indent="0" marL="0">
+              <a:buNone/>
+            </a:pPr>
+            <a:r>
+              <a:rPr lang="en-US" sz="1100" b="1" dirty="0">
+                <a:solidFill>
+                  <a:srgbClr val="92400E"/>
+                </a:solidFill>
+                <a:latin typeface="Calibri" pitchFamily="34" charset="0"/>
+                <a:ea typeface="Calibri" pitchFamily="34" charset="-122"/>
+                <a:cs typeface="Calibri" pitchFamily="34" charset="-120"/>
+              </a:rPr>
+              <a:t>USE NOW</a:t>
+            </a:r>
+            <a:pPr indent="0" marL="0">
+              <a:buNone/>
+            </a:pPr>
+            <a:r>
+              <a:rPr lang="en-US" sz="1100" dirty="0">
+                <a:solidFill>
+                  <a:srgbClr val="92400E"/>
+                </a:solidFill>
+                <a:latin typeface="Calibri" pitchFamily="34" charset="0"/>
+                <a:ea typeface="Calibri" pitchFamily="34" charset="-122"/>
+                <a:cs typeface="Calibri" pitchFamily="34" charset="-120"/>
+              </a:rPr>
+              <a:t> · the complete program</a:t>
+            </a:r>
+            <a:endParaRPr lang="en-US" sz="1100" dirty="0"/>
+          </a:p>
+        </p:txBody>
+      </p:sp>
+      <p:sp>
+        <p:nvSpPr>
           <p:cNvPr id="25" name="Slide Number Placeholder 0"/>
           <p:cNvSpPr>
             <a:spLocks noGrp="1"/>
@@ -5383,6 +6270,158 @@
       </p:sp>
       <p:sp>
         <p:nvSpPr>
+          <p:cNvPr id="5" name="Shape 3"/>
+          <p:cNvSpPr/>
+          <p:nvPr/>
+        </p:nvSpPr>
+        <p:spPr>
+          <a:xfrm>
+            <a:off x="8959672" y="91440"/>
+            <a:ext cx="2683383" cy="274320"/>
+          </a:xfrm>
+          <a:prstGeom prst="rect">
+            <a:avLst/>
+          </a:prstGeom>
+          <a:solidFill>
+            <a:srgbClr val="FEF3C7"/>
+          </a:solidFill>
+          <a:ln w="12700">
+            <a:solidFill>
+              <a:srgbClr val="B45309"/>
+            </a:solidFill>
+            <a:prstDash val="solid"/>
+          </a:ln>
+        </p:spPr>
+      </p:sp>
+      <p:sp>
+        <p:nvSpPr>
+          <p:cNvPr id="6" name="Shape 4"/>
+          <p:cNvSpPr/>
+          <p:nvPr/>
+        </p:nvSpPr>
+        <p:spPr>
+          <a:xfrm>
+            <a:off x="8959672" y="91440"/>
+            <a:ext cx="27432" cy="274320"/>
+          </a:xfrm>
+          <a:prstGeom prst="rect">
+            <a:avLst/>
+          </a:prstGeom>
+          <a:solidFill>
+            <a:srgbClr val="B45309"/>
+          </a:solidFill>
+          <a:ln w="12700">
+            <a:solidFill>
+              <a:srgbClr val="B45309"/>
+            </a:solidFill>
+            <a:prstDash val="solid"/>
+          </a:ln>
+        </p:spPr>
+      </p:sp>
+      <p:sp>
+        <p:nvSpPr>
+          <p:cNvPr id="7" name="Shape 5"/>
+          <p:cNvSpPr/>
+          <p:nvPr/>
+        </p:nvSpPr>
+        <p:spPr>
+          <a:xfrm>
+            <a:off x="9014536" y="91440"/>
+            <a:ext cx="27432" cy="274320"/>
+          </a:xfrm>
+          <a:prstGeom prst="rect">
+            <a:avLst/>
+          </a:prstGeom>
+          <a:solidFill>
+            <a:srgbClr val="B45309"/>
+          </a:solidFill>
+          <a:ln w="12700">
+            <a:solidFill>
+              <a:srgbClr val="B45309"/>
+            </a:solidFill>
+            <a:prstDash val="solid"/>
+          </a:ln>
+        </p:spPr>
+      </p:sp>
+      <p:pic>
+        <p:nvPicPr>
+          <p:cNvPr id="8" name="Image 0" descr="preencoded.png">    </p:cNvPr>
+          <p:cNvPicPr>
+            <a:picLocks noChangeAspect="1"/>
+          </p:cNvPicPr>
+          <p:nvPr/>
+        </p:nvPicPr>
+        <p:blipFill>
+          <a:blip r:embed="rId1"/>
+          <a:stretch>
+            <a:fillRect/>
+          </a:stretch>
+        </p:blipFill>
+        <p:spPr>
+          <a:xfrm>
+            <a:off x="9087688" y="128016"/>
+            <a:ext cx="201168" cy="201168"/>
+          </a:xfrm>
+          <a:prstGeom prst="rect">
+            <a:avLst/>
+          </a:prstGeom>
+        </p:spPr>
+      </p:pic>
+      <p:sp>
+        <p:nvSpPr>
+          <p:cNvPr id="9" name="Text 6"/>
+          <p:cNvSpPr txBox="1"/>
+          <p:nvPr/>
+        </p:nvSpPr>
+        <p:spPr>
+          <a:xfrm>
+            <a:off x="9343720" y="91440"/>
+            <a:ext cx="2262759" cy="274320"/>
+          </a:xfrm>
+          <a:prstGeom prst="rect">
+            <a:avLst/>
+          </a:prstGeom>
+          <a:noFill/>
+          <a:ln/>
+        </p:spPr>
+        <p:txBody>
+          <a:bodyPr wrap="square" lIns="0" tIns="0" rIns="0" bIns="0" rtlCol="0" anchor="ctr"/>
+          <a:lstStyle/>
+          <a:p>
+            <a:pPr indent="0" marL="0">
+              <a:buNone/>
+            </a:pPr>
+            <a:r>
+              <a:rPr lang="en-US" sz="1100" b="1" dirty="0">
+                <a:solidFill>
+                  <a:srgbClr val="92400E"/>
+                </a:solidFill>
+                <a:latin typeface="Calibri" pitchFamily="34" charset="0"/>
+                <a:ea typeface="Calibri" pitchFamily="34" charset="-122"/>
+                <a:cs typeface="Calibri" pitchFamily="34" charset="-120"/>
+              </a:rPr>
+              <a:t>USE NOW</a:t>
+            </a:r>
+            <a:pPr indent="0" marL="0">
+              <a:buNone/>
+            </a:pPr>
+            <a:r>
+              <a:rPr lang="en-US" sz="1100" dirty="0">
+                <a:solidFill>
+                  <a:srgbClr val="92400E"/>
+                </a:solidFill>
+                <a:latin typeface="Calibri" pitchFamily="34" charset="0"/>
+                <a:ea typeface="Calibri" pitchFamily="34" charset="-122"/>
+                <a:cs typeface="Calibri" pitchFamily="34" charset="-120"/>
+              </a:rPr>
+              <a:t> · the complete program</a:t>
+            </a:r>
+            <a:endParaRPr lang="en-US" sz="1100" dirty="0"/>
+          </a:p>
+        </p:txBody>
+      </p:sp>
+      <p:sp>
+        <p:nvSpPr>
           <p:cNvPr id="25" name="Slide Number Placeholder 0"/>
           <p:cNvSpPr>
             <a:spLocks noGrp="1"/>
@@ -6536,6 +7575,158 @@
       </p:sp>
       <p:sp>
         <p:nvSpPr>
+          <p:cNvPr id="17" name="Shape 15"/>
+          <p:cNvSpPr/>
+          <p:nvPr/>
+        </p:nvSpPr>
+        <p:spPr>
+          <a:xfrm>
+            <a:off x="9287967" y="91440"/>
+            <a:ext cx="2355088" cy="274320"/>
+          </a:xfrm>
+          <a:prstGeom prst="rect">
+            <a:avLst/>
+          </a:prstGeom>
+          <a:solidFill>
+            <a:srgbClr val="FEF3C7"/>
+          </a:solidFill>
+          <a:ln w="12700">
+            <a:solidFill>
+              <a:srgbClr val="B45309"/>
+            </a:solidFill>
+            <a:prstDash val="solid"/>
+          </a:ln>
+        </p:spPr>
+      </p:sp>
+      <p:sp>
+        <p:nvSpPr>
+          <p:cNvPr id="18" name="Shape 16"/>
+          <p:cNvSpPr/>
+          <p:nvPr/>
+        </p:nvSpPr>
+        <p:spPr>
+          <a:xfrm>
+            <a:off x="9287967" y="91440"/>
+            <a:ext cx="27432" cy="274320"/>
+          </a:xfrm>
+          <a:prstGeom prst="rect">
+            <a:avLst/>
+          </a:prstGeom>
+          <a:solidFill>
+            <a:srgbClr val="B45309"/>
+          </a:solidFill>
+          <a:ln w="12700">
+            <a:solidFill>
+              <a:srgbClr val="B45309"/>
+            </a:solidFill>
+            <a:prstDash val="solid"/>
+          </a:ln>
+        </p:spPr>
+      </p:sp>
+      <p:sp>
+        <p:nvSpPr>
+          <p:cNvPr id="19" name="Shape 17"/>
+          <p:cNvSpPr/>
+          <p:nvPr/>
+        </p:nvSpPr>
+        <p:spPr>
+          <a:xfrm>
+            <a:off x="9342831" y="91440"/>
+            <a:ext cx="27432" cy="274320"/>
+          </a:xfrm>
+          <a:prstGeom prst="rect">
+            <a:avLst/>
+          </a:prstGeom>
+          <a:solidFill>
+            <a:srgbClr val="B45309"/>
+          </a:solidFill>
+          <a:ln w="12700">
+            <a:solidFill>
+              <a:srgbClr val="B45309"/>
+            </a:solidFill>
+            <a:prstDash val="solid"/>
+          </a:ln>
+        </p:spPr>
+      </p:sp>
+      <p:pic>
+        <p:nvPicPr>
+          <p:cNvPr id="20" name="Image 0" descr="preencoded.png">    </p:cNvPr>
+          <p:cNvPicPr>
+            <a:picLocks noChangeAspect="1"/>
+          </p:cNvPicPr>
+          <p:nvPr/>
+        </p:nvPicPr>
+        <p:blipFill>
+          <a:blip r:embed="rId1"/>
+          <a:stretch>
+            <a:fillRect/>
+          </a:stretch>
+        </p:blipFill>
+        <p:spPr>
+          <a:xfrm>
+            <a:off x="9415983" y="128016"/>
+            <a:ext cx="201168" cy="201168"/>
+          </a:xfrm>
+          <a:prstGeom prst="rect">
+            <a:avLst/>
+          </a:prstGeom>
+        </p:spPr>
+      </p:pic>
+      <p:sp>
+        <p:nvSpPr>
+          <p:cNvPr id="21" name="Text 18"/>
+          <p:cNvSpPr txBox="1"/>
+          <p:nvPr/>
+        </p:nvSpPr>
+        <p:spPr>
+          <a:xfrm>
+            <a:off x="9672015" y="91440"/>
+            <a:ext cx="1934464" cy="274320"/>
+          </a:xfrm>
+          <a:prstGeom prst="rect">
+            <a:avLst/>
+          </a:prstGeom>
+          <a:noFill/>
+          <a:ln/>
+        </p:spPr>
+        <p:txBody>
+          <a:bodyPr wrap="square" lIns="0" tIns="0" rIns="0" bIns="0" rtlCol="0" anchor="ctr"/>
+          <a:lstStyle/>
+          <a:p>
+            <a:pPr indent="0" marL="0">
+              <a:buNone/>
+            </a:pPr>
+            <a:r>
+              <a:rPr lang="en-US" sz="1100" b="1" dirty="0">
+                <a:solidFill>
+                  <a:srgbClr val="92400E"/>
+                </a:solidFill>
+                <a:latin typeface="Calibri" pitchFamily="34" charset="0"/>
+                <a:ea typeface="Calibri" pitchFamily="34" charset="-122"/>
+                <a:cs typeface="Calibri" pitchFamily="34" charset="-120"/>
+              </a:rPr>
+              <a:t>USE NOW</a:t>
+            </a:r>
+            <a:pPr indent="0" marL="0">
+              <a:buNone/>
+            </a:pPr>
+            <a:r>
+              <a:rPr lang="en-US" sz="1100" dirty="0">
+                <a:solidFill>
+                  <a:srgbClr val="92400E"/>
+                </a:solidFill>
+                <a:latin typeface="Calibri" pitchFamily="34" charset="0"/>
+                <a:ea typeface="Calibri" pitchFamily="34" charset="-122"/>
+                <a:cs typeface="Calibri" pitchFamily="34" charset="-120"/>
+              </a:rPr>
+              <a:t> · the PRG32 tools</a:t>
+            </a:r>
+            <a:endParaRPr lang="en-US" sz="1100" dirty="0"/>
+          </a:p>
+        </p:txBody>
+      </p:sp>
+      <p:sp>
+        <p:nvSpPr>
           <p:cNvPr id="25" name="Slide Number Placeholder 0"/>
           <p:cNvSpPr>
             <a:spLocks noGrp="1"/>
@@ -7372,6 +8563,158 @@
       </p:sp>
       <p:sp>
         <p:nvSpPr>
+          <p:cNvPr id="17" name="Shape 15"/>
+          <p:cNvSpPr/>
+          <p:nvPr/>
+        </p:nvSpPr>
+        <p:spPr>
+          <a:xfrm>
+            <a:off x="9287967" y="91440"/>
+            <a:ext cx="2355088" cy="274320"/>
+          </a:xfrm>
+          <a:prstGeom prst="rect">
+            <a:avLst/>
+          </a:prstGeom>
+          <a:solidFill>
+            <a:srgbClr val="FEF3C7"/>
+          </a:solidFill>
+          <a:ln w="12700">
+            <a:solidFill>
+              <a:srgbClr val="B45309"/>
+            </a:solidFill>
+            <a:prstDash val="solid"/>
+          </a:ln>
+        </p:spPr>
+      </p:sp>
+      <p:sp>
+        <p:nvSpPr>
+          <p:cNvPr id="18" name="Shape 16"/>
+          <p:cNvSpPr/>
+          <p:nvPr/>
+        </p:nvSpPr>
+        <p:spPr>
+          <a:xfrm>
+            <a:off x="9287967" y="91440"/>
+            <a:ext cx="27432" cy="274320"/>
+          </a:xfrm>
+          <a:prstGeom prst="rect">
+            <a:avLst/>
+          </a:prstGeom>
+          <a:solidFill>
+            <a:srgbClr val="B45309"/>
+          </a:solidFill>
+          <a:ln w="12700">
+            <a:solidFill>
+              <a:srgbClr val="B45309"/>
+            </a:solidFill>
+            <a:prstDash val="solid"/>
+          </a:ln>
+        </p:spPr>
+      </p:sp>
+      <p:sp>
+        <p:nvSpPr>
+          <p:cNvPr id="19" name="Shape 17"/>
+          <p:cNvSpPr/>
+          <p:nvPr/>
+        </p:nvSpPr>
+        <p:spPr>
+          <a:xfrm>
+            <a:off x="9342831" y="91440"/>
+            <a:ext cx="27432" cy="274320"/>
+          </a:xfrm>
+          <a:prstGeom prst="rect">
+            <a:avLst/>
+          </a:prstGeom>
+          <a:solidFill>
+            <a:srgbClr val="B45309"/>
+          </a:solidFill>
+          <a:ln w="12700">
+            <a:solidFill>
+              <a:srgbClr val="B45309"/>
+            </a:solidFill>
+            <a:prstDash val="solid"/>
+          </a:ln>
+        </p:spPr>
+      </p:sp>
+      <p:pic>
+        <p:nvPicPr>
+          <p:cNvPr id="20" name="Image 0" descr="preencoded.png">    </p:cNvPr>
+          <p:cNvPicPr>
+            <a:picLocks noChangeAspect="1"/>
+          </p:cNvPicPr>
+          <p:nvPr/>
+        </p:nvPicPr>
+        <p:blipFill>
+          <a:blip r:embed="rId1"/>
+          <a:stretch>
+            <a:fillRect/>
+          </a:stretch>
+        </p:blipFill>
+        <p:spPr>
+          <a:xfrm>
+            <a:off x="9415983" y="128016"/>
+            <a:ext cx="201168" cy="201168"/>
+          </a:xfrm>
+          <a:prstGeom prst="rect">
+            <a:avLst/>
+          </a:prstGeom>
+        </p:spPr>
+      </p:pic>
+      <p:sp>
+        <p:nvSpPr>
+          <p:cNvPr id="21" name="Text 18"/>
+          <p:cNvSpPr txBox="1"/>
+          <p:nvPr/>
+        </p:nvSpPr>
+        <p:spPr>
+          <a:xfrm>
+            <a:off x="9672015" y="91440"/>
+            <a:ext cx="1934464" cy="274320"/>
+          </a:xfrm>
+          <a:prstGeom prst="rect">
+            <a:avLst/>
+          </a:prstGeom>
+          <a:noFill/>
+          <a:ln/>
+        </p:spPr>
+        <p:txBody>
+          <a:bodyPr wrap="square" lIns="0" tIns="0" rIns="0" bIns="0" rtlCol="0" anchor="ctr"/>
+          <a:lstStyle/>
+          <a:p>
+            <a:pPr indent="0" marL="0">
+              <a:buNone/>
+            </a:pPr>
+            <a:r>
+              <a:rPr lang="en-US" sz="1100" b="1" dirty="0">
+                <a:solidFill>
+                  <a:srgbClr val="92400E"/>
+                </a:solidFill>
+                <a:latin typeface="Calibri" pitchFamily="34" charset="0"/>
+                <a:ea typeface="Calibri" pitchFamily="34" charset="-122"/>
+                <a:cs typeface="Calibri" pitchFamily="34" charset="-120"/>
+              </a:rPr>
+              <a:t>USE NOW</a:t>
+            </a:r>
+            <a:pPr indent="0" marL="0">
+              <a:buNone/>
+            </a:pPr>
+            <a:r>
+              <a:rPr lang="en-US" sz="1100" dirty="0">
+                <a:solidFill>
+                  <a:srgbClr val="92400E"/>
+                </a:solidFill>
+                <a:latin typeface="Calibri" pitchFamily="34" charset="0"/>
+                <a:ea typeface="Calibri" pitchFamily="34" charset="-122"/>
+                <a:cs typeface="Calibri" pitchFamily="34" charset="-120"/>
+              </a:rPr>
+              <a:t> · the PRG32 tools</a:t>
+            </a:r>
+            <a:endParaRPr lang="en-US" sz="1100" dirty="0"/>
+          </a:p>
+        </p:txBody>
+      </p:sp>
+      <p:sp>
+        <p:nvSpPr>
           <p:cNvPr id="25" name="Slide Number Placeholder 0"/>
           <p:cNvSpPr>
             <a:spLocks noGrp="1"/>
@@ -8203,6 +9546,158 @@
               <a:t>A black screen: check the wiring of the display against the firmware</a:t>
             </a:r>
             <a:endParaRPr lang="en-US" sz="1200" dirty="0"/>
+          </a:p>
+        </p:txBody>
+      </p:sp>
+      <p:sp>
+        <p:nvSpPr>
+          <p:cNvPr id="17" name="Shape 15"/>
+          <p:cNvSpPr/>
+          <p:nvPr/>
+        </p:nvSpPr>
+        <p:spPr>
+          <a:xfrm>
+            <a:off x="9287967" y="91440"/>
+            <a:ext cx="2355088" cy="274320"/>
+          </a:xfrm>
+          <a:prstGeom prst="rect">
+            <a:avLst/>
+          </a:prstGeom>
+          <a:solidFill>
+            <a:srgbClr val="FEF3C7"/>
+          </a:solidFill>
+          <a:ln w="12700">
+            <a:solidFill>
+              <a:srgbClr val="B45309"/>
+            </a:solidFill>
+            <a:prstDash val="solid"/>
+          </a:ln>
+        </p:spPr>
+      </p:sp>
+      <p:sp>
+        <p:nvSpPr>
+          <p:cNvPr id="18" name="Shape 16"/>
+          <p:cNvSpPr/>
+          <p:nvPr/>
+        </p:nvSpPr>
+        <p:spPr>
+          <a:xfrm>
+            <a:off x="9287967" y="91440"/>
+            <a:ext cx="27432" cy="274320"/>
+          </a:xfrm>
+          <a:prstGeom prst="rect">
+            <a:avLst/>
+          </a:prstGeom>
+          <a:solidFill>
+            <a:srgbClr val="B45309"/>
+          </a:solidFill>
+          <a:ln w="12700">
+            <a:solidFill>
+              <a:srgbClr val="B45309"/>
+            </a:solidFill>
+            <a:prstDash val="solid"/>
+          </a:ln>
+        </p:spPr>
+      </p:sp>
+      <p:sp>
+        <p:nvSpPr>
+          <p:cNvPr id="19" name="Shape 17"/>
+          <p:cNvSpPr/>
+          <p:nvPr/>
+        </p:nvSpPr>
+        <p:spPr>
+          <a:xfrm>
+            <a:off x="9342831" y="91440"/>
+            <a:ext cx="27432" cy="274320"/>
+          </a:xfrm>
+          <a:prstGeom prst="rect">
+            <a:avLst/>
+          </a:prstGeom>
+          <a:solidFill>
+            <a:srgbClr val="B45309"/>
+          </a:solidFill>
+          <a:ln w="12700">
+            <a:solidFill>
+              <a:srgbClr val="B45309"/>
+            </a:solidFill>
+            <a:prstDash val="solid"/>
+          </a:ln>
+        </p:spPr>
+      </p:sp>
+      <p:pic>
+        <p:nvPicPr>
+          <p:cNvPr id="20" name="Image 0" descr="preencoded.png">    </p:cNvPr>
+          <p:cNvPicPr>
+            <a:picLocks noChangeAspect="1"/>
+          </p:cNvPicPr>
+          <p:nvPr/>
+        </p:nvPicPr>
+        <p:blipFill>
+          <a:blip r:embed="rId1"/>
+          <a:stretch>
+            <a:fillRect/>
+          </a:stretch>
+        </p:blipFill>
+        <p:spPr>
+          <a:xfrm>
+            <a:off x="9415983" y="128016"/>
+            <a:ext cx="201168" cy="201168"/>
+          </a:xfrm>
+          <a:prstGeom prst="rect">
+            <a:avLst/>
+          </a:prstGeom>
+        </p:spPr>
+      </p:pic>
+      <p:sp>
+        <p:nvSpPr>
+          <p:cNvPr id="21" name="Text 18"/>
+          <p:cNvSpPr txBox="1"/>
+          <p:nvPr/>
+        </p:nvSpPr>
+        <p:spPr>
+          <a:xfrm>
+            <a:off x="9672015" y="91440"/>
+            <a:ext cx="1934464" cy="274320"/>
+          </a:xfrm>
+          <a:prstGeom prst="rect">
+            <a:avLst/>
+          </a:prstGeom>
+          <a:noFill/>
+          <a:ln/>
+        </p:spPr>
+        <p:txBody>
+          <a:bodyPr wrap="square" lIns="0" tIns="0" rIns="0" bIns="0" rtlCol="0" anchor="ctr"/>
+          <a:lstStyle/>
+          <a:p>
+            <a:pPr indent="0" marL="0">
+              <a:buNone/>
+            </a:pPr>
+            <a:r>
+              <a:rPr lang="en-US" sz="1100" b="1" dirty="0">
+                <a:solidFill>
+                  <a:srgbClr val="92400E"/>
+                </a:solidFill>
+                <a:latin typeface="Calibri" pitchFamily="34" charset="0"/>
+                <a:ea typeface="Calibri" pitchFamily="34" charset="-122"/>
+                <a:cs typeface="Calibri" pitchFamily="34" charset="-120"/>
+              </a:rPr>
+              <a:t>USE NOW</a:t>
+            </a:r>
+            <a:pPr indent="0" marL="0">
+              <a:buNone/>
+            </a:pPr>
+            <a:r>
+              <a:rPr lang="en-US" sz="1100" dirty="0">
+                <a:solidFill>
+                  <a:srgbClr val="92400E"/>
+                </a:solidFill>
+                <a:latin typeface="Calibri" pitchFamily="34" charset="0"/>
+                <a:ea typeface="Calibri" pitchFamily="34" charset="-122"/>
+                <a:cs typeface="Calibri" pitchFamily="34" charset="-120"/>
+              </a:rPr>
+              <a:t> · the PRG32 tools</a:t>
+            </a:r>
+            <a:endParaRPr lang="en-US" sz="1100" dirty="0"/>
           </a:p>
         </p:txBody>
       </p:sp>
@@ -9589,6 +11084,158 @@
       </p:graphicFrame>
       <p:sp>
         <p:nvSpPr>
+          <p:cNvPr id="4" name="Shape 1"/>
+          <p:cNvSpPr/>
+          <p:nvPr/>
+        </p:nvSpPr>
+        <p:spPr>
+          <a:xfrm>
+            <a:off x="9287967" y="91440"/>
+            <a:ext cx="2355088" cy="274320"/>
+          </a:xfrm>
+          <a:prstGeom prst="rect">
+            <a:avLst/>
+          </a:prstGeom>
+          <a:solidFill>
+            <a:srgbClr val="FEF3C7"/>
+          </a:solidFill>
+          <a:ln w="12700">
+            <a:solidFill>
+              <a:srgbClr val="B45309"/>
+            </a:solidFill>
+            <a:prstDash val="solid"/>
+          </a:ln>
+        </p:spPr>
+      </p:sp>
+      <p:sp>
+        <p:nvSpPr>
+          <p:cNvPr id="5" name="Shape 2"/>
+          <p:cNvSpPr/>
+          <p:nvPr/>
+        </p:nvSpPr>
+        <p:spPr>
+          <a:xfrm>
+            <a:off x="9287967" y="91440"/>
+            <a:ext cx="27432" cy="274320"/>
+          </a:xfrm>
+          <a:prstGeom prst="rect">
+            <a:avLst/>
+          </a:prstGeom>
+          <a:solidFill>
+            <a:srgbClr val="B45309"/>
+          </a:solidFill>
+          <a:ln w="12700">
+            <a:solidFill>
+              <a:srgbClr val="B45309"/>
+            </a:solidFill>
+            <a:prstDash val="solid"/>
+          </a:ln>
+        </p:spPr>
+      </p:sp>
+      <p:sp>
+        <p:nvSpPr>
+          <p:cNvPr id="6" name="Shape 3"/>
+          <p:cNvSpPr/>
+          <p:nvPr/>
+        </p:nvSpPr>
+        <p:spPr>
+          <a:xfrm>
+            <a:off x="9342831" y="91440"/>
+            <a:ext cx="27432" cy="274320"/>
+          </a:xfrm>
+          <a:prstGeom prst="rect">
+            <a:avLst/>
+          </a:prstGeom>
+          <a:solidFill>
+            <a:srgbClr val="B45309"/>
+          </a:solidFill>
+          <a:ln w="12700">
+            <a:solidFill>
+              <a:srgbClr val="B45309"/>
+            </a:solidFill>
+            <a:prstDash val="solid"/>
+          </a:ln>
+        </p:spPr>
+      </p:sp>
+      <p:pic>
+        <p:nvPicPr>
+          <p:cNvPr id="7" name="Image 0" descr="preencoded.png">    </p:cNvPr>
+          <p:cNvPicPr>
+            <a:picLocks noChangeAspect="1"/>
+          </p:cNvPicPr>
+          <p:nvPr/>
+        </p:nvPicPr>
+        <p:blipFill>
+          <a:blip r:embed="rId1"/>
+          <a:stretch>
+            <a:fillRect/>
+          </a:stretch>
+        </p:blipFill>
+        <p:spPr>
+          <a:xfrm>
+            <a:off x="9415983" y="128016"/>
+            <a:ext cx="201168" cy="201168"/>
+          </a:xfrm>
+          <a:prstGeom prst="rect">
+            <a:avLst/>
+          </a:prstGeom>
+        </p:spPr>
+      </p:pic>
+      <p:sp>
+        <p:nvSpPr>
+          <p:cNvPr id="8" name="Text 4"/>
+          <p:cNvSpPr txBox="1"/>
+          <p:nvPr/>
+        </p:nvSpPr>
+        <p:spPr>
+          <a:xfrm>
+            <a:off x="9672015" y="91440"/>
+            <a:ext cx="1934464" cy="274320"/>
+          </a:xfrm>
+          <a:prstGeom prst="rect">
+            <a:avLst/>
+          </a:prstGeom>
+          <a:noFill/>
+          <a:ln/>
+        </p:spPr>
+        <p:txBody>
+          <a:bodyPr wrap="square" lIns="0" tIns="0" rIns="0" bIns="0" rtlCol="0" anchor="ctr"/>
+          <a:lstStyle/>
+          <a:p>
+            <a:pPr indent="0" marL="0">
+              <a:buNone/>
+            </a:pPr>
+            <a:r>
+              <a:rPr lang="en-US" sz="1100" b="1" dirty="0">
+                <a:solidFill>
+                  <a:srgbClr val="92400E"/>
+                </a:solidFill>
+                <a:latin typeface="Calibri" pitchFamily="34" charset="0"/>
+                <a:ea typeface="Calibri" pitchFamily="34" charset="-122"/>
+                <a:cs typeface="Calibri" pitchFamily="34" charset="-120"/>
+              </a:rPr>
+              <a:t>USE NOW</a:t>
+            </a:r>
+            <a:pPr indent="0" marL="0">
+              <a:buNone/>
+            </a:pPr>
+            <a:r>
+              <a:rPr lang="en-US" sz="1100" dirty="0">
+                <a:solidFill>
+                  <a:srgbClr val="92400E"/>
+                </a:solidFill>
+                <a:latin typeface="Calibri" pitchFamily="34" charset="0"/>
+                <a:ea typeface="Calibri" pitchFamily="34" charset="-122"/>
+                <a:cs typeface="Calibri" pitchFamily="34" charset="-120"/>
+              </a:rPr>
+              <a:t> · the PRG32 tools</a:t>
+            </a:r>
+            <a:endParaRPr lang="en-US" sz="1100" dirty="0"/>
+          </a:p>
+        </p:txBody>
+      </p:sp>
+      <p:sp>
+        <p:nvSpPr>
           <p:cNvPr id="25" name="Slide Number Placeholder 0"/>
           <p:cNvSpPr>
             <a:spLocks noGrp="1"/>
@@ -11576,6 +13223,133 @@
       </p:sp>
       <p:sp>
         <p:nvSpPr>
+          <p:cNvPr id="17" name="Shape 15"/>
+          <p:cNvSpPr/>
+          <p:nvPr/>
+        </p:nvSpPr>
+        <p:spPr>
+          <a:xfrm>
+            <a:off x="8419033" y="91440"/>
+            <a:ext cx="3224022" cy="274320"/>
+          </a:xfrm>
+          <a:prstGeom prst="rect">
+            <a:avLst/>
+          </a:prstGeom>
+          <a:solidFill>
+            <a:srgbClr val="E0F2FE"/>
+          </a:solidFill>
+          <a:ln w="12700">
+            <a:solidFill>
+              <a:srgbClr val="0369A1"/>
+            </a:solidFill>
+            <a:prstDash val="solid"/>
+          </a:ln>
+        </p:spPr>
+      </p:sp>
+      <p:sp>
+        <p:nvSpPr>
+          <p:cNvPr id="18" name="Shape 16"/>
+          <p:cNvSpPr/>
+          <p:nvPr/>
+        </p:nvSpPr>
+        <p:spPr>
+          <a:xfrm>
+            <a:off x="8419033" y="91440"/>
+            <a:ext cx="73152" cy="274320"/>
+          </a:xfrm>
+          <a:prstGeom prst="rect">
+            <a:avLst/>
+          </a:prstGeom>
+          <a:solidFill>
+            <a:srgbClr val="0369A1"/>
+          </a:solidFill>
+          <a:ln w="12700">
+            <a:solidFill>
+              <a:srgbClr val="0369A1"/>
+            </a:solidFill>
+            <a:prstDash val="solid"/>
+          </a:ln>
+        </p:spPr>
+      </p:sp>
+      <p:pic>
+        <p:nvPicPr>
+          <p:cNvPr id="19" name="Image 0" descr="preencoded.png">    </p:cNvPr>
+          <p:cNvPicPr>
+            <a:picLocks noChangeAspect="1"/>
+          </p:cNvPicPr>
+          <p:nvPr/>
+        </p:nvPicPr>
+        <p:blipFill>
+          <a:blip r:embed="rId1"/>
+          <a:stretch>
+            <a:fillRect/>
+          </a:stretch>
+        </p:blipFill>
+        <p:spPr>
+          <a:xfrm>
+            <a:off x="8547049" y="128016"/>
+            <a:ext cx="201168" cy="201168"/>
+          </a:xfrm>
+          <a:prstGeom prst="rect">
+            <a:avLst/>
+          </a:prstGeom>
+        </p:spPr>
+      </p:pic>
+      <p:sp>
+        <p:nvSpPr>
+          <p:cNvPr id="20" name="Text 17"/>
+          <p:cNvSpPr txBox="1"/>
+          <p:nvPr/>
+        </p:nvSpPr>
+        <p:spPr>
+          <a:xfrm>
+            <a:off x="8803081" y="91440"/>
+            <a:ext cx="2803398" cy="274320"/>
+          </a:xfrm>
+          <a:prstGeom prst="rect">
+            <a:avLst/>
+          </a:prstGeom>
+          <a:noFill/>
+          <a:ln/>
+        </p:spPr>
+        <p:txBody>
+          <a:bodyPr wrap="square" lIns="0" tIns="0" rIns="0" bIns="0" rtlCol="0" anchor="ctr"/>
+          <a:lstStyle/>
+          <a:p>
+            <a:pPr indent="0" marL="0">
+              <a:buNone/>
+            </a:pPr>
+            <a:r>
+              <a:rPr lang="en-US" sz="1100" b="1" dirty="0">
+                <a:solidFill>
+                  <a:srgbClr val="075985"/>
+                </a:solidFill>
+                <a:latin typeface="Calibri" pitchFamily="34" charset="0"/>
+                <a:ea typeface="Calibri" pitchFamily="34" charset="-122"/>
+                <a:cs typeface="Calibri" pitchFamily="34" charset="-120"/>
+              </a:rPr>
+              <a:t>UNDERSTAND NOW</a:t>
+            </a:r>
+            <a:pPr indent="0" marL="0">
+              <a:buNone/>
+            </a:pPr>
+            <a:r>
+              <a:rPr lang="en-US" sz="1100" dirty="0">
+                <a:solidFill>
+                  <a:srgbClr val="075985"/>
+                </a:solidFill>
+                <a:latin typeface="Calibri" pitchFamily="34" charset="0"/>
+                <a:ea typeface="Calibri" pitchFamily="34" charset="-122"/>
+                <a:cs typeface="Calibri" pitchFamily="34" charset="-120"/>
+              </a:rPr>
+              <a:t> · instruction formats</a:t>
+            </a:r>
+            <a:endParaRPr lang="en-US" sz="1100" dirty="0"/>
+          </a:p>
+        </p:txBody>
+      </p:sp>
+      <p:sp>
+        <p:nvSpPr>
           <p:cNvPr id="25" name="Slide Number Placeholder 0"/>
           <p:cNvSpPr>
             <a:spLocks noGrp="1"/>
@@ -13810,6 +15584,133 @@
               <a:t>0</a:t>
             </a:r>
             <a:endParaRPr lang="en-US" sz="1050" dirty="0"/>
+          </a:p>
+        </p:txBody>
+      </p:sp>
+      <p:sp>
+        <p:nvSpPr>
+          <p:cNvPr id="51" name="Shape 49"/>
+          <p:cNvSpPr/>
+          <p:nvPr/>
+        </p:nvSpPr>
+        <p:spPr>
+          <a:xfrm>
+            <a:off x="8419033" y="91440"/>
+            <a:ext cx="3224022" cy="274320"/>
+          </a:xfrm>
+          <a:prstGeom prst="rect">
+            <a:avLst/>
+          </a:prstGeom>
+          <a:solidFill>
+            <a:srgbClr val="E0F2FE"/>
+          </a:solidFill>
+          <a:ln w="12700">
+            <a:solidFill>
+              <a:srgbClr val="0369A1"/>
+            </a:solidFill>
+            <a:prstDash val="solid"/>
+          </a:ln>
+        </p:spPr>
+      </p:sp>
+      <p:sp>
+        <p:nvSpPr>
+          <p:cNvPr id="52" name="Shape 50"/>
+          <p:cNvSpPr/>
+          <p:nvPr/>
+        </p:nvSpPr>
+        <p:spPr>
+          <a:xfrm>
+            <a:off x="8419033" y="91440"/>
+            <a:ext cx="73152" cy="274320"/>
+          </a:xfrm>
+          <a:prstGeom prst="rect">
+            <a:avLst/>
+          </a:prstGeom>
+          <a:solidFill>
+            <a:srgbClr val="0369A1"/>
+          </a:solidFill>
+          <a:ln w="12700">
+            <a:solidFill>
+              <a:srgbClr val="0369A1"/>
+            </a:solidFill>
+            <a:prstDash val="solid"/>
+          </a:ln>
+        </p:spPr>
+      </p:sp>
+      <p:pic>
+        <p:nvPicPr>
+          <p:cNvPr id="53" name="Image 0" descr="preencoded.png">    </p:cNvPr>
+          <p:cNvPicPr>
+            <a:picLocks noChangeAspect="1"/>
+          </p:cNvPicPr>
+          <p:nvPr/>
+        </p:nvPicPr>
+        <p:blipFill>
+          <a:blip r:embed="rId1"/>
+          <a:stretch>
+            <a:fillRect/>
+          </a:stretch>
+        </p:blipFill>
+        <p:spPr>
+          <a:xfrm>
+            <a:off x="8547049" y="128016"/>
+            <a:ext cx="201168" cy="201168"/>
+          </a:xfrm>
+          <a:prstGeom prst="rect">
+            <a:avLst/>
+          </a:prstGeom>
+        </p:spPr>
+      </p:pic>
+      <p:sp>
+        <p:nvSpPr>
+          <p:cNvPr id="54" name="Text 51"/>
+          <p:cNvSpPr txBox="1"/>
+          <p:nvPr/>
+        </p:nvSpPr>
+        <p:spPr>
+          <a:xfrm>
+            <a:off x="8803081" y="91440"/>
+            <a:ext cx="2803398" cy="274320"/>
+          </a:xfrm>
+          <a:prstGeom prst="rect">
+            <a:avLst/>
+          </a:prstGeom>
+          <a:noFill/>
+          <a:ln/>
+        </p:spPr>
+        <p:txBody>
+          <a:bodyPr wrap="square" lIns="0" tIns="0" rIns="0" bIns="0" rtlCol="0" anchor="ctr"/>
+          <a:lstStyle/>
+          <a:p>
+            <a:pPr indent="0" marL="0">
+              <a:buNone/>
+            </a:pPr>
+            <a:r>
+              <a:rPr lang="en-US" sz="1100" b="1" dirty="0">
+                <a:solidFill>
+                  <a:srgbClr val="075985"/>
+                </a:solidFill>
+                <a:latin typeface="Calibri" pitchFamily="34" charset="0"/>
+                <a:ea typeface="Calibri" pitchFamily="34" charset="-122"/>
+                <a:cs typeface="Calibri" pitchFamily="34" charset="-120"/>
+              </a:rPr>
+              <a:t>UNDERSTAND NOW</a:t>
+            </a:r>
+            <a:pPr indent="0" marL="0">
+              <a:buNone/>
+            </a:pPr>
+            <a:r>
+              <a:rPr lang="en-US" sz="1100" dirty="0">
+                <a:solidFill>
+                  <a:srgbClr val="075985"/>
+                </a:solidFill>
+                <a:latin typeface="Calibri" pitchFamily="34" charset="0"/>
+                <a:ea typeface="Calibri" pitchFamily="34" charset="-122"/>
+                <a:cs typeface="Calibri" pitchFamily="34" charset="-120"/>
+              </a:rPr>
+              <a:t> · instruction formats</a:t>
+            </a:r>
+            <a:endParaRPr lang="en-US" sz="1100" dirty="0"/>
           </a:p>
         </p:txBody>
       </p:sp>
@@ -14990,6 +16891,133 @@
       </p:graphicFrame>
       <p:sp>
         <p:nvSpPr>
+          <p:cNvPr id="4" name="Shape 1"/>
+          <p:cNvSpPr/>
+          <p:nvPr/>
+        </p:nvSpPr>
+        <p:spPr>
+          <a:xfrm>
+            <a:off x="8419033" y="91440"/>
+            <a:ext cx="3224022" cy="274320"/>
+          </a:xfrm>
+          <a:prstGeom prst="rect">
+            <a:avLst/>
+          </a:prstGeom>
+          <a:solidFill>
+            <a:srgbClr val="E0F2FE"/>
+          </a:solidFill>
+          <a:ln w="12700">
+            <a:solidFill>
+              <a:srgbClr val="0369A1"/>
+            </a:solidFill>
+            <a:prstDash val="solid"/>
+          </a:ln>
+        </p:spPr>
+      </p:sp>
+      <p:sp>
+        <p:nvSpPr>
+          <p:cNvPr id="5" name="Shape 2"/>
+          <p:cNvSpPr/>
+          <p:nvPr/>
+        </p:nvSpPr>
+        <p:spPr>
+          <a:xfrm>
+            <a:off x="8419033" y="91440"/>
+            <a:ext cx="73152" cy="274320"/>
+          </a:xfrm>
+          <a:prstGeom prst="rect">
+            <a:avLst/>
+          </a:prstGeom>
+          <a:solidFill>
+            <a:srgbClr val="0369A1"/>
+          </a:solidFill>
+          <a:ln w="12700">
+            <a:solidFill>
+              <a:srgbClr val="0369A1"/>
+            </a:solidFill>
+            <a:prstDash val="solid"/>
+          </a:ln>
+        </p:spPr>
+      </p:sp>
+      <p:pic>
+        <p:nvPicPr>
+          <p:cNvPr id="6" name="Image 0" descr="preencoded.png">    </p:cNvPr>
+          <p:cNvPicPr>
+            <a:picLocks noChangeAspect="1"/>
+          </p:cNvPicPr>
+          <p:nvPr/>
+        </p:nvPicPr>
+        <p:blipFill>
+          <a:blip r:embed="rId1"/>
+          <a:stretch>
+            <a:fillRect/>
+          </a:stretch>
+        </p:blipFill>
+        <p:spPr>
+          <a:xfrm>
+            <a:off x="8547049" y="128016"/>
+            <a:ext cx="201168" cy="201168"/>
+          </a:xfrm>
+          <a:prstGeom prst="rect">
+            <a:avLst/>
+          </a:prstGeom>
+        </p:spPr>
+      </p:pic>
+      <p:sp>
+        <p:nvSpPr>
+          <p:cNvPr id="7" name="Text 3"/>
+          <p:cNvSpPr txBox="1"/>
+          <p:nvPr/>
+        </p:nvSpPr>
+        <p:spPr>
+          <a:xfrm>
+            <a:off x="8803081" y="91440"/>
+            <a:ext cx="2803398" cy="274320"/>
+          </a:xfrm>
+          <a:prstGeom prst="rect">
+            <a:avLst/>
+          </a:prstGeom>
+          <a:noFill/>
+          <a:ln/>
+        </p:spPr>
+        <p:txBody>
+          <a:bodyPr wrap="square" lIns="0" tIns="0" rIns="0" bIns="0" rtlCol="0" anchor="ctr"/>
+          <a:lstStyle/>
+          <a:p>
+            <a:pPr indent="0" marL="0">
+              <a:buNone/>
+            </a:pPr>
+            <a:r>
+              <a:rPr lang="en-US" sz="1100" b="1" dirty="0">
+                <a:solidFill>
+                  <a:srgbClr val="075985"/>
+                </a:solidFill>
+                <a:latin typeface="Calibri" pitchFamily="34" charset="0"/>
+                <a:ea typeface="Calibri" pitchFamily="34" charset="-122"/>
+                <a:cs typeface="Calibri" pitchFamily="34" charset="-120"/>
+              </a:rPr>
+              <a:t>UNDERSTAND NOW</a:t>
+            </a:r>
+            <a:pPr indent="0" marL="0">
+              <a:buNone/>
+            </a:pPr>
+            <a:r>
+              <a:rPr lang="en-US" sz="1100" dirty="0">
+                <a:solidFill>
+                  <a:srgbClr val="075985"/>
+                </a:solidFill>
+                <a:latin typeface="Calibri" pitchFamily="34" charset="0"/>
+                <a:ea typeface="Calibri" pitchFamily="34" charset="-122"/>
+                <a:cs typeface="Calibri" pitchFamily="34" charset="-120"/>
+              </a:rPr>
+              <a:t> · the processor cycle</a:t>
+            </a:r>
+            <a:endParaRPr lang="en-US" sz="1100" dirty="0"/>
+          </a:p>
+        </p:txBody>
+      </p:sp>
+      <p:sp>
+        <p:nvSpPr>
           <p:cNvPr id="25" name="Slide Number Placeholder 0"/>
           <p:cNvSpPr>
             <a:spLocks noGrp="1"/>
@@ -16204,6 +18232,133 @@
       </p:sp>
       <p:sp>
         <p:nvSpPr>
+          <p:cNvPr id="5" name="Shape 2"/>
+          <p:cNvSpPr/>
+          <p:nvPr/>
+        </p:nvSpPr>
+        <p:spPr>
+          <a:xfrm>
+            <a:off x="8419033" y="91440"/>
+            <a:ext cx="3224022" cy="274320"/>
+          </a:xfrm>
+          <a:prstGeom prst="rect">
+            <a:avLst/>
+          </a:prstGeom>
+          <a:solidFill>
+            <a:srgbClr val="E0F2FE"/>
+          </a:solidFill>
+          <a:ln w="12700">
+            <a:solidFill>
+              <a:srgbClr val="0369A1"/>
+            </a:solidFill>
+            <a:prstDash val="solid"/>
+          </a:ln>
+        </p:spPr>
+      </p:sp>
+      <p:sp>
+        <p:nvSpPr>
+          <p:cNvPr id="6" name="Shape 3"/>
+          <p:cNvSpPr/>
+          <p:nvPr/>
+        </p:nvSpPr>
+        <p:spPr>
+          <a:xfrm>
+            <a:off x="8419033" y="91440"/>
+            <a:ext cx="73152" cy="274320"/>
+          </a:xfrm>
+          <a:prstGeom prst="rect">
+            <a:avLst/>
+          </a:prstGeom>
+          <a:solidFill>
+            <a:srgbClr val="0369A1"/>
+          </a:solidFill>
+          <a:ln w="12700">
+            <a:solidFill>
+              <a:srgbClr val="0369A1"/>
+            </a:solidFill>
+            <a:prstDash val="solid"/>
+          </a:ln>
+        </p:spPr>
+      </p:sp>
+      <p:pic>
+        <p:nvPicPr>
+          <p:cNvPr id="7" name="Image 0" descr="preencoded.png">    </p:cNvPr>
+          <p:cNvPicPr>
+            <a:picLocks noChangeAspect="1"/>
+          </p:cNvPicPr>
+          <p:nvPr/>
+        </p:nvPicPr>
+        <p:blipFill>
+          <a:blip r:embed="rId1"/>
+          <a:stretch>
+            <a:fillRect/>
+          </a:stretch>
+        </p:blipFill>
+        <p:spPr>
+          <a:xfrm>
+            <a:off x="8547049" y="128016"/>
+            <a:ext cx="201168" cy="201168"/>
+          </a:xfrm>
+          <a:prstGeom prst="rect">
+            <a:avLst/>
+          </a:prstGeom>
+        </p:spPr>
+      </p:pic>
+      <p:sp>
+        <p:nvSpPr>
+          <p:cNvPr id="8" name="Text 4"/>
+          <p:cNvSpPr txBox="1"/>
+          <p:nvPr/>
+        </p:nvSpPr>
+        <p:spPr>
+          <a:xfrm>
+            <a:off x="8803081" y="91440"/>
+            <a:ext cx="2803398" cy="274320"/>
+          </a:xfrm>
+          <a:prstGeom prst="rect">
+            <a:avLst/>
+          </a:prstGeom>
+          <a:noFill/>
+          <a:ln/>
+        </p:spPr>
+        <p:txBody>
+          <a:bodyPr wrap="square" lIns="0" tIns="0" rIns="0" bIns="0" rtlCol="0" anchor="ctr"/>
+          <a:lstStyle/>
+          <a:p>
+            <a:pPr indent="0" marL="0">
+              <a:buNone/>
+            </a:pPr>
+            <a:r>
+              <a:rPr lang="en-US" sz="1100" b="1" dirty="0">
+                <a:solidFill>
+                  <a:srgbClr val="075985"/>
+                </a:solidFill>
+                <a:latin typeface="Calibri" pitchFamily="34" charset="0"/>
+                <a:ea typeface="Calibri" pitchFamily="34" charset="-122"/>
+                <a:cs typeface="Calibri" pitchFamily="34" charset="-120"/>
+              </a:rPr>
+              <a:t>UNDERSTAND NOW</a:t>
+            </a:r>
+            <a:pPr indent="0" marL="0">
+              <a:buNone/>
+            </a:pPr>
+            <a:r>
+              <a:rPr lang="en-US" sz="1100" dirty="0">
+                <a:solidFill>
+                  <a:srgbClr val="075985"/>
+                </a:solidFill>
+                <a:latin typeface="Calibri" pitchFamily="34" charset="0"/>
+                <a:ea typeface="Calibri" pitchFamily="34" charset="-122"/>
+                <a:cs typeface="Calibri" pitchFamily="34" charset="-120"/>
+              </a:rPr>
+              <a:t> · the processor cycle</a:t>
+            </a:r>
+            <a:endParaRPr lang="en-US" sz="1100" dirty="0"/>
+          </a:p>
+        </p:txBody>
+      </p:sp>
+      <p:sp>
+        <p:nvSpPr>
           <p:cNvPr id="25" name="Slide Number Placeholder 0"/>
           <p:cNvSpPr>
             <a:spLocks noGrp="1"/>
@@ -17124,6 +19279,133 @@
       </p:sp>
       <p:sp>
         <p:nvSpPr>
+          <p:cNvPr id="17" name="Shape 15"/>
+          <p:cNvSpPr/>
+          <p:nvPr/>
+        </p:nvSpPr>
+        <p:spPr>
+          <a:xfrm>
+            <a:off x="8353374" y="91440"/>
+            <a:ext cx="3289681" cy="274320"/>
+          </a:xfrm>
+          <a:prstGeom prst="rect">
+            <a:avLst/>
+          </a:prstGeom>
+          <a:solidFill>
+            <a:srgbClr val="E0F2FE"/>
+          </a:solidFill>
+          <a:ln w="12700">
+            <a:solidFill>
+              <a:srgbClr val="0369A1"/>
+            </a:solidFill>
+            <a:prstDash val="solid"/>
+          </a:ln>
+        </p:spPr>
+      </p:sp>
+      <p:sp>
+        <p:nvSpPr>
+          <p:cNvPr id="18" name="Shape 16"/>
+          <p:cNvSpPr/>
+          <p:nvPr/>
+        </p:nvSpPr>
+        <p:spPr>
+          <a:xfrm>
+            <a:off x="8353374" y="91440"/>
+            <a:ext cx="73152" cy="274320"/>
+          </a:xfrm>
+          <a:prstGeom prst="rect">
+            <a:avLst/>
+          </a:prstGeom>
+          <a:solidFill>
+            <a:srgbClr val="0369A1"/>
+          </a:solidFill>
+          <a:ln w="12700">
+            <a:solidFill>
+              <a:srgbClr val="0369A1"/>
+            </a:solidFill>
+            <a:prstDash val="solid"/>
+          </a:ln>
+        </p:spPr>
+      </p:sp>
+      <p:pic>
+        <p:nvPicPr>
+          <p:cNvPr id="19" name="Image 0" descr="preencoded.png">    </p:cNvPr>
+          <p:cNvPicPr>
+            <a:picLocks noChangeAspect="1"/>
+          </p:cNvPicPr>
+          <p:nvPr/>
+        </p:nvPicPr>
+        <p:blipFill>
+          <a:blip r:embed="rId1"/>
+          <a:stretch>
+            <a:fillRect/>
+          </a:stretch>
+        </p:blipFill>
+        <p:spPr>
+          <a:xfrm>
+            <a:off x="8481390" y="128016"/>
+            <a:ext cx="201168" cy="201168"/>
+          </a:xfrm>
+          <a:prstGeom prst="rect">
+            <a:avLst/>
+          </a:prstGeom>
+        </p:spPr>
+      </p:pic>
+      <p:sp>
+        <p:nvSpPr>
+          <p:cNvPr id="20" name="Text 17"/>
+          <p:cNvSpPr txBox="1"/>
+          <p:nvPr/>
+        </p:nvSpPr>
+        <p:spPr>
+          <a:xfrm>
+            <a:off x="8737422" y="91440"/>
+            <a:ext cx="2869057" cy="274320"/>
+          </a:xfrm>
+          <a:prstGeom prst="rect">
+            <a:avLst/>
+          </a:prstGeom>
+          <a:noFill/>
+          <a:ln/>
+        </p:spPr>
+        <p:txBody>
+          <a:bodyPr wrap="square" lIns="0" tIns="0" rIns="0" bIns="0" rtlCol="0" anchor="ctr"/>
+          <a:lstStyle/>
+          <a:p>
+            <a:pPr indent="0" marL="0">
+              <a:buNone/>
+            </a:pPr>
+            <a:r>
+              <a:rPr lang="en-US" sz="1100" b="1" dirty="0">
+                <a:solidFill>
+                  <a:srgbClr val="075985"/>
+                </a:solidFill>
+                <a:latin typeface="Calibri" pitchFamily="34" charset="0"/>
+                <a:ea typeface="Calibri" pitchFamily="34" charset="-122"/>
+                <a:cs typeface="Calibri" pitchFamily="34" charset="-120"/>
+              </a:rPr>
+              <a:t>UNDERSTAND NOW</a:t>
+            </a:r>
+            <a:pPr indent="0" marL="0">
+              <a:buNone/>
+            </a:pPr>
+            <a:r>
+              <a:rPr lang="en-US" sz="1100" dirty="0">
+                <a:solidFill>
+                  <a:srgbClr val="075985"/>
+                </a:solidFill>
+                <a:latin typeface="Calibri" pitchFamily="34" charset="0"/>
+                <a:ea typeface="Calibri" pitchFamily="34" charset="-122"/>
+                <a:cs typeface="Calibri" pitchFamily="34" charset="-120"/>
+              </a:rPr>
+              <a:t> · interrupts and traps</a:t>
+            </a:r>
+            <a:endParaRPr lang="en-US" sz="1100" dirty="0"/>
+          </a:p>
+        </p:txBody>
+      </p:sp>
+      <p:sp>
+        <p:nvSpPr>
           <p:cNvPr id="25" name="Slide Number Placeholder 0"/>
           <p:cNvSpPr>
             <a:spLocks noGrp="1"/>
@@ -17678,6 +19960,158 @@
       </p:sp>
       <p:sp>
         <p:nvSpPr>
+          <p:cNvPr id="5" name="Shape 3"/>
+          <p:cNvSpPr/>
+          <p:nvPr/>
+        </p:nvSpPr>
+        <p:spPr>
+          <a:xfrm>
+            <a:off x="8959672" y="91440"/>
+            <a:ext cx="2683383" cy="274320"/>
+          </a:xfrm>
+          <a:prstGeom prst="rect">
+            <a:avLst/>
+          </a:prstGeom>
+          <a:solidFill>
+            <a:srgbClr val="FEF3C7"/>
+          </a:solidFill>
+          <a:ln w="12700">
+            <a:solidFill>
+              <a:srgbClr val="B45309"/>
+            </a:solidFill>
+            <a:prstDash val="solid"/>
+          </a:ln>
+        </p:spPr>
+      </p:sp>
+      <p:sp>
+        <p:nvSpPr>
+          <p:cNvPr id="6" name="Shape 4"/>
+          <p:cNvSpPr/>
+          <p:nvPr/>
+        </p:nvSpPr>
+        <p:spPr>
+          <a:xfrm>
+            <a:off x="8959672" y="91440"/>
+            <a:ext cx="27432" cy="274320"/>
+          </a:xfrm>
+          <a:prstGeom prst="rect">
+            <a:avLst/>
+          </a:prstGeom>
+          <a:solidFill>
+            <a:srgbClr val="B45309"/>
+          </a:solidFill>
+          <a:ln w="12700">
+            <a:solidFill>
+              <a:srgbClr val="B45309"/>
+            </a:solidFill>
+            <a:prstDash val="solid"/>
+          </a:ln>
+        </p:spPr>
+      </p:sp>
+      <p:sp>
+        <p:nvSpPr>
+          <p:cNvPr id="7" name="Shape 5"/>
+          <p:cNvSpPr/>
+          <p:nvPr/>
+        </p:nvSpPr>
+        <p:spPr>
+          <a:xfrm>
+            <a:off x="9014536" y="91440"/>
+            <a:ext cx="27432" cy="274320"/>
+          </a:xfrm>
+          <a:prstGeom prst="rect">
+            <a:avLst/>
+          </a:prstGeom>
+          <a:solidFill>
+            <a:srgbClr val="B45309"/>
+          </a:solidFill>
+          <a:ln w="12700">
+            <a:solidFill>
+              <a:srgbClr val="B45309"/>
+            </a:solidFill>
+            <a:prstDash val="solid"/>
+          </a:ln>
+        </p:spPr>
+      </p:sp>
+      <p:pic>
+        <p:nvPicPr>
+          <p:cNvPr id="8" name="Image 0" descr="preencoded.png">    </p:cNvPr>
+          <p:cNvPicPr>
+            <a:picLocks noChangeAspect="1"/>
+          </p:cNvPicPr>
+          <p:nvPr/>
+        </p:nvPicPr>
+        <p:blipFill>
+          <a:blip r:embed="rId1"/>
+          <a:stretch>
+            <a:fillRect/>
+          </a:stretch>
+        </p:blipFill>
+        <p:spPr>
+          <a:xfrm>
+            <a:off x="9087688" y="128016"/>
+            <a:ext cx="201168" cy="201168"/>
+          </a:xfrm>
+          <a:prstGeom prst="rect">
+            <a:avLst/>
+          </a:prstGeom>
+        </p:spPr>
+      </p:pic>
+      <p:sp>
+        <p:nvSpPr>
+          <p:cNvPr id="9" name="Text 6"/>
+          <p:cNvSpPr txBox="1"/>
+          <p:nvPr/>
+        </p:nvSpPr>
+        <p:spPr>
+          <a:xfrm>
+            <a:off x="9343720" y="91440"/>
+            <a:ext cx="2262759" cy="274320"/>
+          </a:xfrm>
+          <a:prstGeom prst="rect">
+            <a:avLst/>
+          </a:prstGeom>
+          <a:noFill/>
+          <a:ln/>
+        </p:spPr>
+        <p:txBody>
+          <a:bodyPr wrap="square" lIns="0" tIns="0" rIns="0" bIns="0" rtlCol="0" anchor="ctr"/>
+          <a:lstStyle/>
+          <a:p>
+            <a:pPr indent="0" marL="0">
+              <a:buNone/>
+            </a:pPr>
+            <a:r>
+              <a:rPr lang="en-US" sz="1100" b="1" dirty="0">
+                <a:solidFill>
+                  <a:srgbClr val="92400E"/>
+                </a:solidFill>
+                <a:latin typeface="Calibri" pitchFamily="34" charset="0"/>
+                <a:ea typeface="Calibri" pitchFamily="34" charset="-122"/>
+                <a:cs typeface="Calibri" pitchFamily="34" charset="-120"/>
+              </a:rPr>
+              <a:t>USE NOW</a:t>
+            </a:r>
+            <a:pPr indent="0" marL="0">
+              <a:buNone/>
+            </a:pPr>
+            <a:r>
+              <a:rPr lang="en-US" sz="1100" dirty="0">
+                <a:solidFill>
+                  <a:srgbClr val="92400E"/>
+                </a:solidFill>
+                <a:latin typeface="Calibri" pitchFamily="34" charset="0"/>
+                <a:ea typeface="Calibri" pitchFamily="34" charset="-122"/>
+                <a:cs typeface="Calibri" pitchFamily="34" charset="-120"/>
+              </a:rPr>
+              <a:t> · the complete program</a:t>
+            </a:r>
+            <a:endParaRPr lang="en-US" sz="1100" dirty="0"/>
+          </a:p>
+        </p:txBody>
+      </p:sp>
+      <p:sp>
+        <p:nvSpPr>
           <p:cNvPr id="25" name="Slide Number Placeholder 0"/>
           <p:cNvSpPr>
             <a:spLocks noGrp="1"/>
@@ -18096,6 +20530,158 @@
               <a:t>.option pop</a:t>
             </a:r>
             <a:endParaRPr lang="en-US" sz="1800" dirty="0"/>
+          </a:p>
+        </p:txBody>
+      </p:sp>
+      <p:sp>
+        <p:nvSpPr>
+          <p:cNvPr id="5" name="Shape 3"/>
+          <p:cNvSpPr/>
+          <p:nvPr/>
+        </p:nvSpPr>
+        <p:spPr>
+          <a:xfrm>
+            <a:off x="8959672" y="91440"/>
+            <a:ext cx="2683383" cy="274320"/>
+          </a:xfrm>
+          <a:prstGeom prst="rect">
+            <a:avLst/>
+          </a:prstGeom>
+          <a:solidFill>
+            <a:srgbClr val="FEF3C7"/>
+          </a:solidFill>
+          <a:ln w="12700">
+            <a:solidFill>
+              <a:srgbClr val="B45309"/>
+            </a:solidFill>
+            <a:prstDash val="solid"/>
+          </a:ln>
+        </p:spPr>
+      </p:sp>
+      <p:sp>
+        <p:nvSpPr>
+          <p:cNvPr id="6" name="Shape 4"/>
+          <p:cNvSpPr/>
+          <p:nvPr/>
+        </p:nvSpPr>
+        <p:spPr>
+          <a:xfrm>
+            <a:off x="8959672" y="91440"/>
+            <a:ext cx="27432" cy="274320"/>
+          </a:xfrm>
+          <a:prstGeom prst="rect">
+            <a:avLst/>
+          </a:prstGeom>
+          <a:solidFill>
+            <a:srgbClr val="B45309"/>
+          </a:solidFill>
+          <a:ln w="12700">
+            <a:solidFill>
+              <a:srgbClr val="B45309"/>
+            </a:solidFill>
+            <a:prstDash val="solid"/>
+          </a:ln>
+        </p:spPr>
+      </p:sp>
+      <p:sp>
+        <p:nvSpPr>
+          <p:cNvPr id="7" name="Shape 5"/>
+          <p:cNvSpPr/>
+          <p:nvPr/>
+        </p:nvSpPr>
+        <p:spPr>
+          <a:xfrm>
+            <a:off x="9014536" y="91440"/>
+            <a:ext cx="27432" cy="274320"/>
+          </a:xfrm>
+          <a:prstGeom prst="rect">
+            <a:avLst/>
+          </a:prstGeom>
+          <a:solidFill>
+            <a:srgbClr val="B45309"/>
+          </a:solidFill>
+          <a:ln w="12700">
+            <a:solidFill>
+              <a:srgbClr val="B45309"/>
+            </a:solidFill>
+            <a:prstDash val="solid"/>
+          </a:ln>
+        </p:spPr>
+      </p:sp>
+      <p:pic>
+        <p:nvPicPr>
+          <p:cNvPr id="8" name="Image 0" descr="preencoded.png">    </p:cNvPr>
+          <p:cNvPicPr>
+            <a:picLocks noChangeAspect="1"/>
+          </p:cNvPicPr>
+          <p:nvPr/>
+        </p:nvPicPr>
+        <p:blipFill>
+          <a:blip r:embed="rId1"/>
+          <a:stretch>
+            <a:fillRect/>
+          </a:stretch>
+        </p:blipFill>
+        <p:spPr>
+          <a:xfrm>
+            <a:off x="9087688" y="128016"/>
+            <a:ext cx="201168" cy="201168"/>
+          </a:xfrm>
+          <a:prstGeom prst="rect">
+            <a:avLst/>
+          </a:prstGeom>
+        </p:spPr>
+      </p:pic>
+      <p:sp>
+        <p:nvSpPr>
+          <p:cNvPr id="9" name="Text 6"/>
+          <p:cNvSpPr txBox="1"/>
+          <p:nvPr/>
+        </p:nvSpPr>
+        <p:spPr>
+          <a:xfrm>
+            <a:off x="9343720" y="91440"/>
+            <a:ext cx="2262759" cy="274320"/>
+          </a:xfrm>
+          <a:prstGeom prst="rect">
+            <a:avLst/>
+          </a:prstGeom>
+          <a:noFill/>
+          <a:ln/>
+        </p:spPr>
+        <p:txBody>
+          <a:bodyPr wrap="square" lIns="0" tIns="0" rIns="0" bIns="0" rtlCol="0" anchor="ctr"/>
+          <a:lstStyle/>
+          <a:p>
+            <a:pPr indent="0" marL="0">
+              <a:buNone/>
+            </a:pPr>
+            <a:r>
+              <a:rPr lang="en-US" sz="1100" b="1" dirty="0">
+                <a:solidFill>
+                  <a:srgbClr val="92400E"/>
+                </a:solidFill>
+                <a:latin typeface="Calibri" pitchFamily="34" charset="0"/>
+                <a:ea typeface="Calibri" pitchFamily="34" charset="-122"/>
+                <a:cs typeface="Calibri" pitchFamily="34" charset="-120"/>
+              </a:rPr>
+              <a:t>USE NOW</a:t>
+            </a:r>
+            <a:pPr indent="0" marL="0">
+              <a:buNone/>
+            </a:pPr>
+            <a:r>
+              <a:rPr lang="en-US" sz="1100" dirty="0">
+                <a:solidFill>
+                  <a:srgbClr val="92400E"/>
+                </a:solidFill>
+                <a:latin typeface="Calibri" pitchFamily="34" charset="0"/>
+                <a:ea typeface="Calibri" pitchFamily="34" charset="-122"/>
+                <a:cs typeface="Calibri" pitchFamily="34" charset="-120"/>
+              </a:rPr>
+              <a:t> · the complete program</a:t>
+            </a:r>
+            <a:endParaRPr lang="en-US" sz="1100" dirty="0"/>
           </a:p>
         </p:txBody>
       </p:sp>

--- a/en/slides/19-Computer_Architecture-Instructions_and_Interrupts-Code.pptx
+++ b/en/slides/19-Computer_Architecture-Instructions_and_Interrupts-Code.pptx
@@ -125,34 +125,34 @@
   <p:extLst>
     <p:ext uri="{521415D9-36F7-43E2-AB2F-B90AF26B5E84}">
       <p14:sectionLst xmlns:p14="http://schemas.microsoft.com/office/powerpoint/2010/main">
-        <p14:section name="Opening" id="{38aeaa01-4fa7-7fde-d705-dbf7574cdaf6}">
+        <p14:section name="Opening" id="{dfa72bef-de4b-c47d-fec1-7682a805af97}">
           <p14:sldIdLst>
             <p14:sldId id="256"/>
             <p14:sldId id="257"/>
           </p14:sldIdLst>
         </p14:section>
-        <p14:section name="Warm-up on the machine" id="{56046d7c-266b-55db-a2ce-09b64aefe88a}">
+        <p14:section name="Warm-up on the machine" id="{ea446c8d-51de-d378-48e0-b6a058bc0011}">
           <p14:sldIdLst>
             <p14:sldId id="258"/>
           </p14:sldIdLst>
         </p14:section>
-        <p14:section name="Instructions" id="{671a7fe1-682c-9ccd-8b98-e28eac0cea48}">
+        <p14:section name="Instructions" id="{1768369c-ad88-01b5-7604-2dd8ae84e8c1}">
           <p14:sldIdLst>
             <p14:sldId id="259"/>
           </p14:sldIdLst>
         </p14:section>
-        <p14:section name="The processor cycle" id="{4ba86d70-4543-0635-d069-c66f55eea8c8}">
+        <p14:section name="The processor cycle" id="{8c339930-fe5e-2f6c-5aa8-808d11a0a9c5}">
           <p14:sldIdLst>
             <p14:sldId id="260"/>
             <p14:sldId id="261"/>
           </p14:sldIdLst>
         </p14:section>
-        <p14:section name="The RISC-V solution" id="{1de2bd49-81e8-7e90-871b-20f256355ef3}">
+        <p14:section name="The RISC-V solution" id="{d318594a-61f0-6619-dc79-b65819a3bd84}">
           <p14:sldIdLst>
             <p14:sldId id="262"/>
           </p14:sldIdLst>
         </p14:section>
-        <p14:section name="The complete program" id="{6fdb9182-b1c8-6a49-878b-c0a4cfb8de86}">
+        <p14:section name="The complete program" id="{8a4e3be9-f987-c724-a87b-7771a22a1fb9}">
           <p14:sldIdLst>
             <p14:sldId id="263"/>
             <p14:sldId id="264"/>
@@ -162,7 +162,7 @@
             <p14:sldId id="268"/>
           </p14:sldIdLst>
         </p14:section>
-        <p14:section name="Run it and test it" id="{3c33b9a0-0a18-26fb-39ef-c8c967a14813}">
+        <p14:section name="Run it and test it" id="{608ffb53-2eb5-f739-d7d1-25277c79396f}">
           <p14:sldIdLst>
             <p14:sldId id="269"/>
             <p14:sldId id="270"/>
@@ -171,7 +171,7 @@
             <p14:sldId id="273"/>
           </p14:sldIdLst>
         </p14:section>
-        <p14:section name="Exercises" id="{67492b5c-9230-b1db-c9c3-92df2872a6e7}">
+        <p14:section name="Exercises" id="{5e640423-08ae-78c0-1364-4040e316e04b}">
           <p14:sldIdLst>
             <p14:sldId id="274"/>
           </p14:sldIdLst>
